--- a/docs/8_Final_Presentation.pptx
+++ b/docs/8_Final_Presentation.pptx
@@ -5,21 +5,21 @@
     <p:sldMasterId id="2147483648" r:id="rId1"/>
   </p:sldMasterIdLst>
   <p:sldIdLst>
-    <p:sldId id="256" r:id="rId7"/>
-    <p:sldId id="257" r:id="rId8"/>
-    <p:sldId id="258" r:id="rId9"/>
-    <p:sldId id="259" r:id="rId10"/>
-    <p:sldId id="260" r:id="rId11"/>
-    <p:sldId id="261" r:id="rId12"/>
-    <p:sldId id="262" r:id="rId13"/>
-    <p:sldId id="263" r:id="rId14"/>
-    <p:sldId id="264" r:id="rId15"/>
-    <p:sldId id="265" r:id="rId16"/>
-    <p:sldId id="266" r:id="rId17"/>
-    <p:sldId id="267" r:id="rId18"/>
-    <p:sldId id="268" r:id="rId19"/>
-    <p:sldId id="269" r:id="rId20"/>
-    <p:sldId id="270" r:id="rId21"/>
+    <p:sldId id="256" r:id="rId2"/>
+    <p:sldId id="257" r:id="rId3"/>
+    <p:sldId id="258" r:id="rId4"/>
+    <p:sldId id="259" r:id="rId5"/>
+    <p:sldId id="260" r:id="rId6"/>
+    <p:sldId id="261" r:id="rId7"/>
+    <p:sldId id="262" r:id="rId8"/>
+    <p:sldId id="263" r:id="rId9"/>
+    <p:sldId id="264" r:id="rId10"/>
+    <p:sldId id="265" r:id="rId11"/>
+    <p:sldId id="266" r:id="rId12"/>
+    <p:sldId id="267" r:id="rId13"/>
+    <p:sldId id="268" r:id="rId14"/>
+    <p:sldId id="269" r:id="rId15"/>
+    <p:sldId id="270" r:id="rId16"/>
   </p:sldIdLst>
   <p:sldSz cx="9144000" cy="6858000" type="screen4x3"/>
   <p:notesSz cx="6858000" cy="9144000"/>
@@ -118,6 +118,22 @@
       </a:defRPr>
     </a:lvl9pPr>
   </p:defaultTextStyle>
+  <p:extLst>
+    <p:ext uri="{EFAFB233-063F-42B5-8137-9DF3F51BA10A}">
+      <p15:sldGuideLst xmlns:p15="http://schemas.microsoft.com/office/powerpoint/2012/main">
+        <p15:guide id="1" orient="horz" pos="2160">
+          <p15:clr>
+            <a:srgbClr val="A4A3A4"/>
+          </p15:clr>
+        </p15:guide>
+        <p15:guide id="2" pos="2880">
+          <p15:clr>
+            <a:srgbClr val="A4A3A4"/>
+          </p15:clr>
+        </p15:guide>
+      </p15:sldGuideLst>
+    </p:ext>
+  </p:extLst>
 </p:presentation>
 </file>
 
@@ -159,10 +175,9 @@
           <a:lstStyle/>
           <a:p>
             <a:r>
-              <a:rPr lang="en-US" smtClean="0"/>
+              <a:rPr lang="en-US"/>
               <a:t>Click to edit Master title style</a:t>
             </a:r>
-            <a:endParaRPr lang="en-US"/>
           </a:p>
         </p:txBody>
       </p:sp>
@@ -278,10 +293,9 @@
           </a:lstStyle>
           <a:p>
             <a:r>
-              <a:rPr lang="en-US" smtClean="0"/>
+              <a:rPr lang="en-US"/>
               <a:t>Click to edit Master subtitle style</a:t>
             </a:r>
-            <a:endParaRPr lang="en-US"/>
           </a:p>
         </p:txBody>
       </p:sp>
@@ -302,7 +316,7 @@
           <a:p>
             <a:fld id="{5BCAD085-E8A6-8845-BD4E-CB4CCA059FC4}" type="datetimeFigureOut">
               <a:rPr lang="en-US" smtClean="0"/>
-              <a:t>1/27/13</a:t>
+              <a:t>4/19/2026</a:t>
             </a:fld>
             <a:endParaRPr lang="en-US"/>
           </a:p>
@@ -396,10 +410,9 @@
           <a:lstStyle/>
           <a:p>
             <a:r>
-              <a:rPr lang="en-US" smtClean="0"/>
+              <a:rPr lang="en-US"/>
               <a:t>Click to edit Master title style</a:t>
             </a:r>
-            <a:endParaRPr lang="en-US"/>
           </a:p>
         </p:txBody>
       </p:sp>
@@ -420,38 +433,37 @@
           <a:p>
             <a:pPr lvl="0"/>
             <a:r>
-              <a:rPr lang="en-US" smtClean="0"/>
+              <a:rPr lang="en-US"/>
               <a:t>Click to edit Master text styles</a:t>
             </a:r>
           </a:p>
           <a:p>
             <a:pPr lvl="1"/>
             <a:r>
-              <a:rPr lang="en-US" smtClean="0"/>
+              <a:rPr lang="en-US"/>
               <a:t>Second level</a:t>
             </a:r>
           </a:p>
           <a:p>
             <a:pPr lvl="2"/>
             <a:r>
-              <a:rPr lang="en-US" smtClean="0"/>
+              <a:rPr lang="en-US"/>
               <a:t>Third level</a:t>
             </a:r>
           </a:p>
           <a:p>
             <a:pPr lvl="3"/>
             <a:r>
-              <a:rPr lang="en-US" smtClean="0"/>
+              <a:rPr lang="en-US"/>
               <a:t>Fourth level</a:t>
             </a:r>
           </a:p>
           <a:p>
             <a:pPr lvl="4"/>
             <a:r>
-              <a:rPr lang="en-US" smtClean="0"/>
+              <a:rPr lang="en-US"/>
               <a:t>Fifth level</a:t>
             </a:r>
-            <a:endParaRPr lang="en-US"/>
           </a:p>
         </p:txBody>
       </p:sp>
@@ -472,7 +484,7 @@
           <a:p>
             <a:fld id="{5BCAD085-E8A6-8845-BD4E-CB4CCA059FC4}" type="datetimeFigureOut">
               <a:rPr lang="en-US" smtClean="0"/>
-              <a:t>1/27/13</a:t>
+              <a:t>4/19/2026</a:t>
             </a:fld>
             <a:endParaRPr lang="en-US"/>
           </a:p>
@@ -571,10 +583,9 @@
           <a:lstStyle/>
           <a:p>
             <a:r>
-              <a:rPr lang="en-US" smtClean="0"/>
+              <a:rPr lang="en-US"/>
               <a:t>Click to edit Master title style</a:t>
             </a:r>
-            <a:endParaRPr lang="en-US"/>
           </a:p>
         </p:txBody>
       </p:sp>
@@ -600,38 +611,37 @@
           <a:p>
             <a:pPr lvl="0"/>
             <a:r>
-              <a:rPr lang="en-US" smtClean="0"/>
+              <a:rPr lang="en-US"/>
               <a:t>Click to edit Master text styles</a:t>
             </a:r>
           </a:p>
           <a:p>
             <a:pPr lvl="1"/>
             <a:r>
-              <a:rPr lang="en-US" smtClean="0"/>
+              <a:rPr lang="en-US"/>
               <a:t>Second level</a:t>
             </a:r>
           </a:p>
           <a:p>
             <a:pPr lvl="2"/>
             <a:r>
-              <a:rPr lang="en-US" smtClean="0"/>
+              <a:rPr lang="en-US"/>
               <a:t>Third level</a:t>
             </a:r>
           </a:p>
           <a:p>
             <a:pPr lvl="3"/>
             <a:r>
-              <a:rPr lang="en-US" smtClean="0"/>
+              <a:rPr lang="en-US"/>
               <a:t>Fourth level</a:t>
             </a:r>
           </a:p>
           <a:p>
             <a:pPr lvl="4"/>
             <a:r>
-              <a:rPr lang="en-US" smtClean="0"/>
+              <a:rPr lang="en-US"/>
               <a:t>Fifth level</a:t>
             </a:r>
-            <a:endParaRPr lang="en-US"/>
           </a:p>
         </p:txBody>
       </p:sp>
@@ -652,7 +662,7 @@
           <a:p>
             <a:fld id="{5BCAD085-E8A6-8845-BD4E-CB4CCA059FC4}" type="datetimeFigureOut">
               <a:rPr lang="en-US" smtClean="0"/>
-              <a:t>1/27/13</a:t>
+              <a:t>4/19/2026</a:t>
             </a:fld>
             <a:endParaRPr lang="en-US"/>
           </a:p>
@@ -746,10 +756,9 @@
           <a:lstStyle/>
           <a:p>
             <a:r>
-              <a:rPr lang="en-US" smtClean="0"/>
+              <a:rPr lang="en-US"/>
               <a:t>Click to edit Master title style</a:t>
             </a:r>
-            <a:endParaRPr lang="en-US"/>
           </a:p>
         </p:txBody>
       </p:sp>
@@ -770,38 +779,37 @@
           <a:p>
             <a:pPr lvl="0"/>
             <a:r>
-              <a:rPr lang="en-US" smtClean="0"/>
+              <a:rPr lang="en-US"/>
               <a:t>Click to edit Master text styles</a:t>
             </a:r>
           </a:p>
           <a:p>
             <a:pPr lvl="1"/>
             <a:r>
-              <a:rPr lang="en-US" smtClean="0"/>
+              <a:rPr lang="en-US"/>
               <a:t>Second level</a:t>
             </a:r>
           </a:p>
           <a:p>
             <a:pPr lvl="2"/>
             <a:r>
-              <a:rPr lang="en-US" smtClean="0"/>
+              <a:rPr lang="en-US"/>
               <a:t>Third level</a:t>
             </a:r>
           </a:p>
           <a:p>
             <a:pPr lvl="3"/>
             <a:r>
-              <a:rPr lang="en-US" smtClean="0"/>
+              <a:rPr lang="en-US"/>
               <a:t>Fourth level</a:t>
             </a:r>
           </a:p>
           <a:p>
             <a:pPr lvl="4"/>
             <a:r>
-              <a:rPr lang="en-US" smtClean="0"/>
+              <a:rPr lang="en-US"/>
               <a:t>Fifth level</a:t>
             </a:r>
-            <a:endParaRPr lang="en-US"/>
           </a:p>
         </p:txBody>
       </p:sp>
@@ -822,7 +830,7 @@
           <a:p>
             <a:fld id="{5BCAD085-E8A6-8845-BD4E-CB4CCA059FC4}" type="datetimeFigureOut">
               <a:rPr lang="en-US" smtClean="0"/>
-              <a:t>1/27/13</a:t>
+              <a:t>4/19/2026</a:t>
             </a:fld>
             <a:endParaRPr lang="en-US"/>
           </a:p>
@@ -925,10 +933,9 @@
           </a:lstStyle>
           <a:p>
             <a:r>
-              <a:rPr lang="en-US" smtClean="0"/>
+              <a:rPr lang="en-US"/>
               <a:t>Click to edit Master title style</a:t>
             </a:r>
-            <a:endParaRPr lang="en-US"/>
           </a:p>
         </p:txBody>
       </p:sp>
@@ -1045,7 +1052,7 @@
           <a:p>
             <a:pPr lvl="0"/>
             <a:r>
-              <a:rPr lang="en-US" smtClean="0"/>
+              <a:rPr lang="en-US"/>
               <a:t>Click to edit Master text styles</a:t>
             </a:r>
           </a:p>
@@ -1068,7 +1075,7 @@
           <a:p>
             <a:fld id="{5BCAD085-E8A6-8845-BD4E-CB4CCA059FC4}" type="datetimeFigureOut">
               <a:rPr lang="en-US" smtClean="0"/>
-              <a:t>1/27/13</a:t>
+              <a:t>4/19/2026</a:t>
             </a:fld>
             <a:endParaRPr lang="en-US"/>
           </a:p>
@@ -1162,10 +1169,9 @@
           <a:lstStyle/>
           <a:p>
             <a:r>
-              <a:rPr lang="en-US" smtClean="0"/>
+              <a:rPr lang="en-US"/>
               <a:t>Click to edit Master title style</a:t>
             </a:r>
-            <a:endParaRPr lang="en-US"/>
           </a:p>
         </p:txBody>
       </p:sp>
@@ -1219,38 +1225,37 @@
           <a:p>
             <a:pPr lvl="0"/>
             <a:r>
-              <a:rPr lang="en-US" smtClean="0"/>
+              <a:rPr lang="en-US"/>
               <a:t>Click to edit Master text styles</a:t>
             </a:r>
           </a:p>
           <a:p>
             <a:pPr lvl="1"/>
             <a:r>
-              <a:rPr lang="en-US" smtClean="0"/>
+              <a:rPr lang="en-US"/>
               <a:t>Second level</a:t>
             </a:r>
           </a:p>
           <a:p>
             <a:pPr lvl="2"/>
             <a:r>
-              <a:rPr lang="en-US" smtClean="0"/>
+              <a:rPr lang="en-US"/>
               <a:t>Third level</a:t>
             </a:r>
           </a:p>
           <a:p>
             <a:pPr lvl="3"/>
             <a:r>
-              <a:rPr lang="en-US" smtClean="0"/>
+              <a:rPr lang="en-US"/>
               <a:t>Fourth level</a:t>
             </a:r>
           </a:p>
           <a:p>
             <a:pPr lvl="4"/>
             <a:r>
-              <a:rPr lang="en-US" smtClean="0"/>
+              <a:rPr lang="en-US"/>
               <a:t>Fifth level</a:t>
             </a:r>
-            <a:endParaRPr lang="en-US"/>
           </a:p>
         </p:txBody>
       </p:sp>
@@ -1304,38 +1309,37 @@
           <a:p>
             <a:pPr lvl="0"/>
             <a:r>
-              <a:rPr lang="en-US" smtClean="0"/>
+              <a:rPr lang="en-US"/>
               <a:t>Click to edit Master text styles</a:t>
             </a:r>
           </a:p>
           <a:p>
             <a:pPr lvl="1"/>
             <a:r>
-              <a:rPr lang="en-US" smtClean="0"/>
+              <a:rPr lang="en-US"/>
               <a:t>Second level</a:t>
             </a:r>
           </a:p>
           <a:p>
             <a:pPr lvl="2"/>
             <a:r>
-              <a:rPr lang="en-US" smtClean="0"/>
+              <a:rPr lang="en-US"/>
               <a:t>Third level</a:t>
             </a:r>
           </a:p>
           <a:p>
             <a:pPr lvl="3"/>
             <a:r>
-              <a:rPr lang="en-US" smtClean="0"/>
+              <a:rPr lang="en-US"/>
               <a:t>Fourth level</a:t>
             </a:r>
           </a:p>
           <a:p>
             <a:pPr lvl="4"/>
             <a:r>
-              <a:rPr lang="en-US" smtClean="0"/>
+              <a:rPr lang="en-US"/>
               <a:t>Fifth level</a:t>
             </a:r>
-            <a:endParaRPr lang="en-US"/>
           </a:p>
         </p:txBody>
       </p:sp>
@@ -1356,7 +1360,7 @@
           <a:p>
             <a:fld id="{5BCAD085-E8A6-8845-BD4E-CB4CCA059FC4}" type="datetimeFigureOut">
               <a:rPr lang="en-US" smtClean="0"/>
-              <a:t>1/27/13</a:t>
+              <a:t>4/19/2026</a:t>
             </a:fld>
             <a:endParaRPr lang="en-US"/>
           </a:p>
@@ -1454,10 +1458,9 @@
           </a:lstStyle>
           <a:p>
             <a:r>
-              <a:rPr lang="en-US" smtClean="0"/>
+              <a:rPr lang="en-US"/>
               <a:t>Click to edit Master title style</a:t>
             </a:r>
-            <a:endParaRPr lang="en-US"/>
           </a:p>
         </p:txBody>
       </p:sp>
@@ -1520,7 +1523,7 @@
           <a:p>
             <a:pPr lvl="0"/>
             <a:r>
-              <a:rPr lang="en-US" smtClean="0"/>
+              <a:rPr lang="en-US"/>
               <a:t>Click to edit Master text styles</a:t>
             </a:r>
           </a:p>
@@ -1576,38 +1579,37 @@
           <a:p>
             <a:pPr lvl="0"/>
             <a:r>
-              <a:rPr lang="en-US" smtClean="0"/>
+              <a:rPr lang="en-US"/>
               <a:t>Click to edit Master text styles</a:t>
             </a:r>
           </a:p>
           <a:p>
             <a:pPr lvl="1"/>
             <a:r>
-              <a:rPr lang="en-US" smtClean="0"/>
+              <a:rPr lang="en-US"/>
               <a:t>Second level</a:t>
             </a:r>
           </a:p>
           <a:p>
             <a:pPr lvl="2"/>
             <a:r>
-              <a:rPr lang="en-US" smtClean="0"/>
+              <a:rPr lang="en-US"/>
               <a:t>Third level</a:t>
             </a:r>
           </a:p>
           <a:p>
             <a:pPr lvl="3"/>
             <a:r>
-              <a:rPr lang="en-US" smtClean="0"/>
+              <a:rPr lang="en-US"/>
               <a:t>Fourth level</a:t>
             </a:r>
           </a:p>
           <a:p>
             <a:pPr lvl="4"/>
             <a:r>
-              <a:rPr lang="en-US" smtClean="0"/>
+              <a:rPr lang="en-US"/>
               <a:t>Fifth level</a:t>
             </a:r>
-            <a:endParaRPr lang="en-US"/>
           </a:p>
         </p:txBody>
       </p:sp>
@@ -1670,7 +1672,7 @@
           <a:p>
             <a:pPr lvl="0"/>
             <a:r>
-              <a:rPr lang="en-US" smtClean="0"/>
+              <a:rPr lang="en-US"/>
               <a:t>Click to edit Master text styles</a:t>
             </a:r>
           </a:p>
@@ -1726,38 +1728,37 @@
           <a:p>
             <a:pPr lvl="0"/>
             <a:r>
-              <a:rPr lang="en-US" smtClean="0"/>
+              <a:rPr lang="en-US"/>
               <a:t>Click to edit Master text styles</a:t>
             </a:r>
           </a:p>
           <a:p>
             <a:pPr lvl="1"/>
             <a:r>
-              <a:rPr lang="en-US" smtClean="0"/>
+              <a:rPr lang="en-US"/>
               <a:t>Second level</a:t>
             </a:r>
           </a:p>
           <a:p>
             <a:pPr lvl="2"/>
             <a:r>
-              <a:rPr lang="en-US" smtClean="0"/>
+              <a:rPr lang="en-US"/>
               <a:t>Third level</a:t>
             </a:r>
           </a:p>
           <a:p>
             <a:pPr lvl="3"/>
             <a:r>
-              <a:rPr lang="en-US" smtClean="0"/>
+              <a:rPr lang="en-US"/>
               <a:t>Fourth level</a:t>
             </a:r>
           </a:p>
           <a:p>
             <a:pPr lvl="4"/>
             <a:r>
-              <a:rPr lang="en-US" smtClean="0"/>
+              <a:rPr lang="en-US"/>
               <a:t>Fifth level</a:t>
             </a:r>
-            <a:endParaRPr lang="en-US"/>
           </a:p>
         </p:txBody>
       </p:sp>
@@ -1778,7 +1779,7 @@
           <a:p>
             <a:fld id="{5BCAD085-E8A6-8845-BD4E-CB4CCA059FC4}" type="datetimeFigureOut">
               <a:rPr lang="en-US" smtClean="0"/>
-              <a:t>1/27/13</a:t>
+              <a:t>4/19/2026</a:t>
             </a:fld>
             <a:endParaRPr lang="en-US"/>
           </a:p>
@@ -1872,10 +1873,9 @@
           <a:lstStyle/>
           <a:p>
             <a:r>
-              <a:rPr lang="en-US" smtClean="0"/>
+              <a:rPr lang="en-US"/>
               <a:t>Click to edit Master title style</a:t>
             </a:r>
-            <a:endParaRPr lang="en-US"/>
           </a:p>
         </p:txBody>
       </p:sp>
@@ -1896,7 +1896,7 @@
           <a:p>
             <a:fld id="{5BCAD085-E8A6-8845-BD4E-CB4CCA059FC4}" type="datetimeFigureOut">
               <a:rPr lang="en-US" smtClean="0"/>
-              <a:t>1/27/13</a:t>
+              <a:t>4/19/2026</a:t>
             </a:fld>
             <a:endParaRPr lang="en-US"/>
           </a:p>
@@ -1991,7 +1991,7 @@
           <a:p>
             <a:fld id="{5BCAD085-E8A6-8845-BD4E-CB4CCA059FC4}" type="datetimeFigureOut">
               <a:rPr lang="en-US" smtClean="0"/>
-              <a:t>1/27/13</a:t>
+              <a:t>4/19/2026</a:t>
             </a:fld>
             <a:endParaRPr lang="en-US"/>
           </a:p>
@@ -2094,10 +2094,9 @@
           </a:lstStyle>
           <a:p>
             <a:r>
-              <a:rPr lang="en-US" smtClean="0"/>
+              <a:rPr lang="en-US"/>
               <a:t>Click to edit Master title style</a:t>
             </a:r>
-            <a:endParaRPr lang="en-US"/>
           </a:p>
         </p:txBody>
       </p:sp>
@@ -2151,38 +2150,37 @@
           <a:p>
             <a:pPr lvl="0"/>
             <a:r>
-              <a:rPr lang="en-US" smtClean="0"/>
+              <a:rPr lang="en-US"/>
               <a:t>Click to edit Master text styles</a:t>
             </a:r>
           </a:p>
           <a:p>
             <a:pPr lvl="1"/>
             <a:r>
-              <a:rPr lang="en-US" smtClean="0"/>
+              <a:rPr lang="en-US"/>
               <a:t>Second level</a:t>
             </a:r>
           </a:p>
           <a:p>
             <a:pPr lvl="2"/>
             <a:r>
-              <a:rPr lang="en-US" smtClean="0"/>
+              <a:rPr lang="en-US"/>
               <a:t>Third level</a:t>
             </a:r>
           </a:p>
           <a:p>
             <a:pPr lvl="3"/>
             <a:r>
-              <a:rPr lang="en-US" smtClean="0"/>
+              <a:rPr lang="en-US"/>
               <a:t>Fourth level</a:t>
             </a:r>
           </a:p>
           <a:p>
             <a:pPr lvl="4"/>
             <a:r>
-              <a:rPr lang="en-US" smtClean="0"/>
+              <a:rPr lang="en-US"/>
               <a:t>Fifth level</a:t>
             </a:r>
-            <a:endParaRPr lang="en-US"/>
           </a:p>
         </p:txBody>
       </p:sp>
@@ -2245,7 +2243,7 @@
           <a:p>
             <a:pPr lvl="0"/>
             <a:r>
-              <a:rPr lang="en-US" smtClean="0"/>
+              <a:rPr lang="en-US"/>
               <a:t>Click to edit Master text styles</a:t>
             </a:r>
           </a:p>
@@ -2268,7 +2266,7 @@
           <a:p>
             <a:fld id="{5BCAD085-E8A6-8845-BD4E-CB4CCA059FC4}" type="datetimeFigureOut">
               <a:rPr lang="en-US" smtClean="0"/>
-              <a:t>1/27/13</a:t>
+              <a:t>4/19/2026</a:t>
             </a:fld>
             <a:endParaRPr lang="en-US"/>
           </a:p>
@@ -2371,10 +2369,9 @@
           </a:lstStyle>
           <a:p>
             <a:r>
-              <a:rPr lang="en-US" smtClean="0"/>
+              <a:rPr lang="en-US"/>
               <a:t>Click to edit Master title style</a:t>
             </a:r>
-            <a:endParaRPr lang="en-US"/>
           </a:p>
         </p:txBody>
       </p:sp>
@@ -2498,7 +2495,7 @@
           <a:p>
             <a:pPr lvl="0"/>
             <a:r>
-              <a:rPr lang="en-US" smtClean="0"/>
+              <a:rPr lang="en-US"/>
               <a:t>Click to edit Master text styles</a:t>
             </a:r>
           </a:p>
@@ -2521,7 +2518,7 @@
           <a:p>
             <a:fld id="{5BCAD085-E8A6-8845-BD4E-CB4CCA059FC4}" type="datetimeFigureOut">
               <a:rPr lang="en-US" smtClean="0"/>
-              <a:t>1/27/13</a:t>
+              <a:t>4/19/2026</a:t>
             </a:fld>
             <a:endParaRPr lang="en-US"/>
           </a:p>
@@ -2630,10 +2627,9 @@
           <a:lstStyle/>
           <a:p>
             <a:r>
-              <a:rPr lang="en-US" smtClean="0"/>
+              <a:rPr lang="en-US"/>
               <a:t>Click to edit Master title style</a:t>
             </a:r>
-            <a:endParaRPr lang="en-US"/>
           </a:p>
         </p:txBody>
       </p:sp>
@@ -2664,38 +2660,37 @@
           <a:p>
             <a:pPr lvl="0"/>
             <a:r>
-              <a:rPr lang="en-US" smtClean="0"/>
+              <a:rPr lang="en-US"/>
               <a:t>Click to edit Master text styles</a:t>
             </a:r>
           </a:p>
           <a:p>
             <a:pPr lvl="1"/>
             <a:r>
-              <a:rPr lang="en-US" smtClean="0"/>
+              <a:rPr lang="en-US"/>
               <a:t>Second level</a:t>
             </a:r>
           </a:p>
           <a:p>
             <a:pPr lvl="2"/>
             <a:r>
-              <a:rPr lang="en-US" smtClean="0"/>
+              <a:rPr lang="en-US"/>
               <a:t>Third level</a:t>
             </a:r>
           </a:p>
           <a:p>
             <a:pPr lvl="3"/>
             <a:r>
-              <a:rPr lang="en-US" smtClean="0"/>
+              <a:rPr lang="en-US"/>
               <a:t>Fourth level</a:t>
             </a:r>
           </a:p>
           <a:p>
             <a:pPr lvl="4"/>
             <a:r>
-              <a:rPr lang="en-US" smtClean="0"/>
+              <a:rPr lang="en-US"/>
               <a:t>Fifth level</a:t>
             </a:r>
-            <a:endParaRPr lang="en-US"/>
           </a:p>
         </p:txBody>
       </p:sp>
@@ -2734,7 +2729,7 @@
           <a:p>
             <a:fld id="{5BCAD085-E8A6-8845-BD4E-CB4CCA059FC4}" type="datetimeFigureOut">
               <a:rPr lang="en-US" smtClean="0"/>
-              <a:t>1/27/13</a:t>
+              <a:t>4/19/2026</a:t>
             </a:fld>
             <a:endParaRPr lang="en-US"/>
           </a:p>
@@ -3093,12 +3088,12 @@
 </file>
 
 <file path=ppt/slides/slide1.xml><?xml version="1.0" encoding="utf-8"?>
-<p:sld xmlns:a="http://schemas.openxmlformats.org/drawingml/2006/main" xmlns:p="http://schemas.openxmlformats.org/presentationml/2006/main" xmlns:r="http://schemas.openxmlformats.org/officeDocument/2006/relationships">
+<p:sld xmlns:a="http://schemas.openxmlformats.org/drawingml/2006/main" xmlns:r="http://schemas.openxmlformats.org/officeDocument/2006/relationships" xmlns:p="http://schemas.openxmlformats.org/presentationml/2006/main">
   <p:cSld>
     <p:bg>
       <p:bgPr>
         <a:solidFill>
-          <a:srgbClr val="1B1B2F"/>
+          <a:srgbClr val="FFFFFF"/>
         </a:solidFill>
         <a:effectLst/>
       </p:bgPr>
@@ -3109,7 +3104,14 @@
         <p:cNvGrpSpPr/>
         <p:nvPr/>
       </p:nvGrpSpPr>
-      <p:grpSpPr/>
+      <p:grpSpPr>
+        <a:xfrm>
+          <a:off x="0" y="0"/>
+          <a:ext cx="0" cy="0"/>
+          <a:chOff x="0" y="0"/>
+          <a:chExt cx="0" cy="0"/>
+        </a:xfrm>
+      </p:grpSpPr>
       <p:sp>
         <p:nvSpPr>
           <p:cNvPr id="2" name="TextBox 1"/>
@@ -3135,7 +3137,7 @@
             <a:pPr algn="ctr">
               <a:defRPr sz="3200" b="1">
                 <a:solidFill>
-                  <a:srgbClr val="007BFF"/>
+                  <a:srgbClr val="000000"/>
                 </a:solidFill>
               </a:defRPr>
             </a:pPr>
@@ -3174,10 +3176,11 @@
             <a:pPr algn="ctr">
               <a:defRPr sz="1800" b="0">
                 <a:solidFill>
-                  <a:srgbClr val="E0E0E0"/>
+                  <a:srgbClr val="555555"/>
                 </a:solidFill>
               </a:defRPr>
             </a:pPr>
+            <a:endParaRPr/>
           </a:p>
         </p:txBody>
       </p:sp>
@@ -3206,7 +3209,7 @@
             <a:pPr algn="ctr">
               <a:defRPr sz="1600" b="0">
                 <a:solidFill>
-                  <a:srgbClr val="FFFFFF"/>
+                  <a:srgbClr val="000000"/>
                 </a:solidFill>
               </a:defRPr>
             </a:pPr>
@@ -3241,7 +3244,7 @@
             <a:pPr algn="ctr">
               <a:defRPr sz="1400" b="0">
                 <a:solidFill>
-                  <a:srgbClr val="E0E0E0"/>
+                  <a:srgbClr val="555555"/>
                 </a:solidFill>
               </a:defRPr>
             </a:pPr>
@@ -3276,7 +3279,7 @@
             <a:pPr algn="ctr">
               <a:defRPr sz="1400" b="0">
                 <a:solidFill>
-                  <a:srgbClr val="E0E0E0"/>
+                  <a:srgbClr val="555555"/>
                 </a:solidFill>
               </a:defRPr>
             </a:pPr>
@@ -3295,12 +3298,12 @@
 </file>
 
 <file path=ppt/slides/slide10.xml><?xml version="1.0" encoding="utf-8"?>
-<p:sld xmlns:a="http://schemas.openxmlformats.org/drawingml/2006/main" xmlns:p="http://schemas.openxmlformats.org/presentationml/2006/main" xmlns:r="http://schemas.openxmlformats.org/officeDocument/2006/relationships">
+<p:sld xmlns:a="http://schemas.openxmlformats.org/drawingml/2006/main" xmlns:r="http://schemas.openxmlformats.org/officeDocument/2006/relationships" xmlns:p="http://schemas.openxmlformats.org/presentationml/2006/main">
   <p:cSld>
     <p:bg>
       <p:bgPr>
         <a:solidFill>
-          <a:srgbClr val="1B1B2F"/>
+          <a:srgbClr val="FFFFFF"/>
         </a:solidFill>
         <a:effectLst/>
       </p:bgPr>
@@ -3311,7 +3314,14 @@
         <p:cNvGrpSpPr/>
         <p:nvPr/>
       </p:nvGrpSpPr>
-      <p:grpSpPr/>
+      <p:grpSpPr>
+        <a:xfrm>
+          <a:off x="0" y="0"/>
+          <a:ext cx="0" cy="0"/>
+          <a:chOff x="0" y="0"/>
+          <a:chExt cx="0" cy="0"/>
+        </a:xfrm>
+      </p:grpSpPr>
       <p:sp>
         <p:nvSpPr>
           <p:cNvPr id="2" name="TextBox 1"/>
@@ -3337,7 +3347,7 @@
             <a:pPr algn="l">
               <a:defRPr sz="2800" b="1">
                 <a:solidFill>
-                  <a:srgbClr val="007BFF"/>
+                  <a:srgbClr val="000000"/>
                 </a:solidFill>
               </a:defRPr>
             </a:pPr>
@@ -3366,10 +3376,34 @@
                 <a:tableStyleId>{5C22544A-7EE6-4342-B048-85BDC9FD1C3A}</a:tableStyleId>
               </a:tblPr>
               <a:tblGrid>
-                <a:gridCol w="2057400"/>
-                <a:gridCol w="2057400"/>
-                <a:gridCol w="2057400"/>
-                <a:gridCol w="2057400"/>
+                <a:gridCol w="2057400">
+                  <a:extLst>
+                    <a:ext uri="{9D8B030D-6E8A-4147-A177-3AD203B41FA5}">
+                      <a16:colId xmlns:a16="http://schemas.microsoft.com/office/drawing/2014/main" val="20000"/>
+                    </a:ext>
+                  </a:extLst>
+                </a:gridCol>
+                <a:gridCol w="2057400">
+                  <a:extLst>
+                    <a:ext uri="{9D8B030D-6E8A-4147-A177-3AD203B41FA5}">
+                      <a16:colId xmlns:a16="http://schemas.microsoft.com/office/drawing/2014/main" val="20001"/>
+                    </a:ext>
+                  </a:extLst>
+                </a:gridCol>
+                <a:gridCol w="2057400">
+                  <a:extLst>
+                    <a:ext uri="{9D8B030D-6E8A-4147-A177-3AD203B41FA5}">
+                      <a16:colId xmlns:a16="http://schemas.microsoft.com/office/drawing/2014/main" val="20002"/>
+                    </a:ext>
+                  </a:extLst>
+                </a:gridCol>
+                <a:gridCol w="2057400">
+                  <a:extLst>
+                    <a:ext uri="{9D8B030D-6E8A-4147-A177-3AD203B41FA5}">
+                      <a16:colId xmlns:a16="http://schemas.microsoft.com/office/drawing/2014/main" val="20003"/>
+                    </a:ext>
+                  </a:extLst>
+                </a:gridCol>
               </a:tblGrid>
               <a:tr h="365760">
                 <a:tc>
@@ -3391,7 +3425,7 @@
                   </a:txBody>
                   <a:tcPr>
                     <a:solidFill>
-                      <a:srgbClr val="007BFF"/>
+                      <a:srgbClr val="000000"/>
                     </a:solidFill>
                   </a:tcPr>
                 </a:tc>
@@ -3414,7 +3448,7 @@
                   </a:txBody>
                   <a:tcPr>
                     <a:solidFill>
-                      <a:srgbClr val="007BFF"/>
+                      <a:srgbClr val="000000"/>
                     </a:solidFill>
                   </a:tcPr>
                 </a:tc>
@@ -3437,7 +3471,7 @@
                   </a:txBody>
                   <a:tcPr>
                     <a:solidFill>
-                      <a:srgbClr val="007BFF"/>
+                      <a:srgbClr val="000000"/>
                     </a:solidFill>
                   </a:tcPr>
                 </a:tc>
@@ -3460,10 +3494,15 @@
                   </a:txBody>
                   <a:tcPr>
                     <a:solidFill>
-                      <a:srgbClr val="007BFF"/>
-                    </a:solidFill>
-                  </a:tcPr>
-                </a:tc>
+                      <a:srgbClr val="000000"/>
+                    </a:solidFill>
+                  </a:tcPr>
+                </a:tc>
+                <a:extLst>
+                  <a:ext uri="{0D108BD9-81ED-4DB2-BD59-A6C34878D82A}">
+                    <a16:rowId xmlns:a16="http://schemas.microsoft.com/office/drawing/2014/main" val="10000"/>
+                  </a:ext>
+                </a:extLst>
               </a:tr>
               <a:tr h="365760">
                 <a:tc>
@@ -3474,7 +3513,7 @@
                       <a:pPr>
                         <a:defRPr sz="1200">
                           <a:solidFill>
-                            <a:srgbClr val="FFFFFF"/>
+                            <a:srgbClr val="000000"/>
                           </a:solidFill>
                         </a:defRPr>
                       </a:pPr>
@@ -3485,7 +3524,7 @@
                   </a:txBody>
                   <a:tcPr>
                     <a:solidFill>
-                      <a:srgbClr val="2A2A40"/>
+                      <a:srgbClr val="F0F0F0"/>
                     </a:solidFill>
                   </a:tcPr>
                 </a:tc>
@@ -3497,7 +3536,7 @@
                       <a:pPr>
                         <a:defRPr sz="1200">
                           <a:solidFill>
-                            <a:srgbClr val="FFFFFF"/>
+                            <a:srgbClr val="000000"/>
                           </a:solidFill>
                         </a:defRPr>
                       </a:pPr>
@@ -3508,7 +3547,7 @@
                   </a:txBody>
                   <a:tcPr>
                     <a:solidFill>
-                      <a:srgbClr val="2A2A40"/>
+                      <a:srgbClr val="F0F0F0"/>
                     </a:solidFill>
                   </a:tcPr>
                 </a:tc>
@@ -3520,7 +3559,7 @@
                       <a:pPr>
                         <a:defRPr sz="1200">
                           <a:solidFill>
-                            <a:srgbClr val="FFFFFF"/>
+                            <a:srgbClr val="000000"/>
                           </a:solidFill>
                         </a:defRPr>
                       </a:pPr>
@@ -3531,7 +3570,7 @@
                   </a:txBody>
                   <a:tcPr>
                     <a:solidFill>
-                      <a:srgbClr val="2A2A40"/>
+                      <a:srgbClr val="F0F0F0"/>
                     </a:solidFill>
                   </a:tcPr>
                 </a:tc>
@@ -3543,7 +3582,7 @@
                       <a:pPr>
                         <a:defRPr sz="1200">
                           <a:solidFill>
-                            <a:srgbClr val="FFFFFF"/>
+                            <a:srgbClr val="000000"/>
                           </a:solidFill>
                         </a:defRPr>
                       </a:pPr>
@@ -3554,10 +3593,15 @@
                   </a:txBody>
                   <a:tcPr>
                     <a:solidFill>
-                      <a:srgbClr val="2A2A40"/>
-                    </a:solidFill>
-                  </a:tcPr>
-                </a:tc>
+                      <a:srgbClr val="F0F0F0"/>
+                    </a:solidFill>
+                  </a:tcPr>
+                </a:tc>
+                <a:extLst>
+                  <a:ext uri="{0D108BD9-81ED-4DB2-BD59-A6C34878D82A}">
+                    <a16:rowId xmlns:a16="http://schemas.microsoft.com/office/drawing/2014/main" val="10001"/>
+                  </a:ext>
+                </a:extLst>
               </a:tr>
               <a:tr h="365760">
                 <a:tc>
@@ -3568,7 +3612,7 @@
                       <a:pPr>
                         <a:defRPr sz="1200">
                           <a:solidFill>
-                            <a:srgbClr val="FFFFFF"/>
+                            <a:srgbClr val="000000"/>
                           </a:solidFill>
                         </a:defRPr>
                       </a:pPr>
@@ -3579,7 +3623,7 @@
                   </a:txBody>
                   <a:tcPr>
                     <a:solidFill>
-                      <a:srgbClr val="222238"/>
+                      <a:srgbClr val="FFFFFF"/>
                     </a:solidFill>
                   </a:tcPr>
                 </a:tc>
@@ -3591,7 +3635,7 @@
                       <a:pPr>
                         <a:defRPr sz="1200">
                           <a:solidFill>
-                            <a:srgbClr val="FFFFFF"/>
+                            <a:srgbClr val="000000"/>
                           </a:solidFill>
                         </a:defRPr>
                       </a:pPr>
@@ -3602,7 +3646,7 @@
                   </a:txBody>
                   <a:tcPr>
                     <a:solidFill>
-                      <a:srgbClr val="222238"/>
+                      <a:srgbClr val="FFFFFF"/>
                     </a:solidFill>
                   </a:tcPr>
                 </a:tc>
@@ -3614,7 +3658,7 @@
                       <a:pPr>
                         <a:defRPr sz="1200">
                           <a:solidFill>
-                            <a:srgbClr val="FFFFFF"/>
+                            <a:srgbClr val="000000"/>
                           </a:solidFill>
                         </a:defRPr>
                       </a:pPr>
@@ -3625,7 +3669,7 @@
                   </a:txBody>
                   <a:tcPr>
                     <a:solidFill>
-                      <a:srgbClr val="222238"/>
+                      <a:srgbClr val="FFFFFF"/>
                     </a:solidFill>
                   </a:tcPr>
                 </a:tc>
@@ -3637,7 +3681,7 @@
                       <a:pPr>
                         <a:defRPr sz="1200">
                           <a:solidFill>
-                            <a:srgbClr val="FFFFFF"/>
+                            <a:srgbClr val="000000"/>
                           </a:solidFill>
                         </a:defRPr>
                       </a:pPr>
@@ -3648,10 +3692,15 @@
                   </a:txBody>
                   <a:tcPr>
                     <a:solidFill>
-                      <a:srgbClr val="222238"/>
-                    </a:solidFill>
-                  </a:tcPr>
-                </a:tc>
+                      <a:srgbClr val="FFFFFF"/>
+                    </a:solidFill>
+                  </a:tcPr>
+                </a:tc>
+                <a:extLst>
+                  <a:ext uri="{0D108BD9-81ED-4DB2-BD59-A6C34878D82A}">
+                    <a16:rowId xmlns:a16="http://schemas.microsoft.com/office/drawing/2014/main" val="10002"/>
+                  </a:ext>
+                </a:extLst>
               </a:tr>
               <a:tr h="365760">
                 <a:tc>
@@ -3662,7 +3711,7 @@
                       <a:pPr>
                         <a:defRPr sz="1200">
                           <a:solidFill>
-                            <a:srgbClr val="FFFFFF"/>
+                            <a:srgbClr val="000000"/>
                           </a:solidFill>
                         </a:defRPr>
                       </a:pPr>
@@ -3673,7 +3722,7 @@
                   </a:txBody>
                   <a:tcPr>
                     <a:solidFill>
-                      <a:srgbClr val="2A2A40"/>
+                      <a:srgbClr val="F0F0F0"/>
                     </a:solidFill>
                   </a:tcPr>
                 </a:tc>
@@ -3685,7 +3734,7 @@
                       <a:pPr>
                         <a:defRPr sz="1200">
                           <a:solidFill>
-                            <a:srgbClr val="FFFFFF"/>
+                            <a:srgbClr val="000000"/>
                           </a:solidFill>
                         </a:defRPr>
                       </a:pPr>
@@ -3696,7 +3745,7 @@
                   </a:txBody>
                   <a:tcPr>
                     <a:solidFill>
-                      <a:srgbClr val="2A2A40"/>
+                      <a:srgbClr val="F0F0F0"/>
                     </a:solidFill>
                   </a:tcPr>
                 </a:tc>
@@ -3708,7 +3757,7 @@
                       <a:pPr>
                         <a:defRPr sz="1200">
                           <a:solidFill>
-                            <a:srgbClr val="FFFFFF"/>
+                            <a:srgbClr val="000000"/>
                           </a:solidFill>
                         </a:defRPr>
                       </a:pPr>
@@ -3719,7 +3768,7 @@
                   </a:txBody>
                   <a:tcPr>
                     <a:solidFill>
-                      <a:srgbClr val="2A2A40"/>
+                      <a:srgbClr val="F0F0F0"/>
                     </a:solidFill>
                   </a:tcPr>
                 </a:tc>
@@ -3731,7 +3780,7 @@
                       <a:pPr>
                         <a:defRPr sz="1200">
                           <a:solidFill>
-                            <a:srgbClr val="FFFFFF"/>
+                            <a:srgbClr val="000000"/>
                           </a:solidFill>
                         </a:defRPr>
                       </a:pPr>
@@ -3742,10 +3791,15 @@
                   </a:txBody>
                   <a:tcPr>
                     <a:solidFill>
-                      <a:srgbClr val="2A2A40"/>
-                    </a:solidFill>
-                  </a:tcPr>
-                </a:tc>
+                      <a:srgbClr val="F0F0F0"/>
+                    </a:solidFill>
+                  </a:tcPr>
+                </a:tc>
+                <a:extLst>
+                  <a:ext uri="{0D108BD9-81ED-4DB2-BD59-A6C34878D82A}">
+                    <a16:rowId xmlns:a16="http://schemas.microsoft.com/office/drawing/2014/main" val="10003"/>
+                  </a:ext>
+                </a:extLst>
               </a:tr>
               <a:tr h="365760">
                 <a:tc>
@@ -3756,7 +3810,7 @@
                       <a:pPr>
                         <a:defRPr sz="1200">
                           <a:solidFill>
-                            <a:srgbClr val="FFFFFF"/>
+                            <a:srgbClr val="000000"/>
                           </a:solidFill>
                         </a:defRPr>
                       </a:pPr>
@@ -3767,7 +3821,7 @@
                   </a:txBody>
                   <a:tcPr>
                     <a:solidFill>
-                      <a:srgbClr val="222238"/>
+                      <a:srgbClr val="FFFFFF"/>
                     </a:solidFill>
                   </a:tcPr>
                 </a:tc>
@@ -3779,7 +3833,7 @@
                       <a:pPr>
                         <a:defRPr sz="1200">
                           <a:solidFill>
-                            <a:srgbClr val="FFFFFF"/>
+                            <a:srgbClr val="000000"/>
                           </a:solidFill>
                         </a:defRPr>
                       </a:pPr>
@@ -3790,7 +3844,7 @@
                   </a:txBody>
                   <a:tcPr>
                     <a:solidFill>
-                      <a:srgbClr val="222238"/>
+                      <a:srgbClr val="FFFFFF"/>
                     </a:solidFill>
                   </a:tcPr>
                 </a:tc>
@@ -3802,7 +3856,7 @@
                       <a:pPr>
                         <a:defRPr sz="1200">
                           <a:solidFill>
-                            <a:srgbClr val="FFFFFF"/>
+                            <a:srgbClr val="000000"/>
                           </a:solidFill>
                         </a:defRPr>
                       </a:pPr>
@@ -3813,7 +3867,7 @@
                   </a:txBody>
                   <a:tcPr>
                     <a:solidFill>
-                      <a:srgbClr val="222238"/>
+                      <a:srgbClr val="FFFFFF"/>
                     </a:solidFill>
                   </a:tcPr>
                 </a:tc>
@@ -3825,7 +3879,7 @@
                       <a:pPr>
                         <a:defRPr sz="1200">
                           <a:solidFill>
-                            <a:srgbClr val="FFFFFF"/>
+                            <a:srgbClr val="000000"/>
                           </a:solidFill>
                         </a:defRPr>
                       </a:pPr>
@@ -3836,10 +3890,15 @@
                   </a:txBody>
                   <a:tcPr>
                     <a:solidFill>
-                      <a:srgbClr val="222238"/>
-                    </a:solidFill>
-                  </a:tcPr>
-                </a:tc>
+                      <a:srgbClr val="FFFFFF"/>
+                    </a:solidFill>
+                  </a:tcPr>
+                </a:tc>
+                <a:extLst>
+                  <a:ext uri="{0D108BD9-81ED-4DB2-BD59-A6C34878D82A}">
+                    <a16:rowId xmlns:a16="http://schemas.microsoft.com/office/drawing/2014/main" val="10004"/>
+                  </a:ext>
+                </a:extLst>
               </a:tr>
               <a:tr h="365760">
                 <a:tc>
@@ -3850,7 +3909,7 @@
                       <a:pPr>
                         <a:defRPr sz="1200">
                           <a:solidFill>
-                            <a:srgbClr val="FFFFFF"/>
+                            <a:srgbClr val="000000"/>
                           </a:solidFill>
                         </a:defRPr>
                       </a:pPr>
@@ -3861,7 +3920,7 @@
                   </a:txBody>
                   <a:tcPr>
                     <a:solidFill>
-                      <a:srgbClr val="2A2A40"/>
+                      <a:srgbClr val="F0F0F0"/>
                     </a:solidFill>
                   </a:tcPr>
                 </a:tc>
@@ -3873,7 +3932,7 @@
                       <a:pPr>
                         <a:defRPr sz="1200">
                           <a:solidFill>
-                            <a:srgbClr val="FFFFFF"/>
+                            <a:srgbClr val="000000"/>
                           </a:solidFill>
                         </a:defRPr>
                       </a:pPr>
@@ -3884,7 +3943,7 @@
                   </a:txBody>
                   <a:tcPr>
                     <a:solidFill>
-                      <a:srgbClr val="2A2A40"/>
+                      <a:srgbClr val="F0F0F0"/>
                     </a:solidFill>
                   </a:tcPr>
                 </a:tc>
@@ -3896,7 +3955,7 @@
                       <a:pPr>
                         <a:defRPr sz="1200">
                           <a:solidFill>
-                            <a:srgbClr val="FFFFFF"/>
+                            <a:srgbClr val="000000"/>
                           </a:solidFill>
                         </a:defRPr>
                       </a:pPr>
@@ -3907,7 +3966,7 @@
                   </a:txBody>
                   <a:tcPr>
                     <a:solidFill>
-                      <a:srgbClr val="2A2A40"/>
+                      <a:srgbClr val="F0F0F0"/>
                     </a:solidFill>
                   </a:tcPr>
                 </a:tc>
@@ -3919,7 +3978,7 @@
                       <a:pPr>
                         <a:defRPr sz="1200">
                           <a:solidFill>
-                            <a:srgbClr val="FFFFFF"/>
+                            <a:srgbClr val="000000"/>
                           </a:solidFill>
                         </a:defRPr>
                       </a:pPr>
@@ -3930,10 +3989,15 @@
                   </a:txBody>
                   <a:tcPr>
                     <a:solidFill>
-                      <a:srgbClr val="2A2A40"/>
-                    </a:solidFill>
-                  </a:tcPr>
-                </a:tc>
+                      <a:srgbClr val="F0F0F0"/>
+                    </a:solidFill>
+                  </a:tcPr>
+                </a:tc>
+                <a:extLst>
+                  <a:ext uri="{0D108BD9-81ED-4DB2-BD59-A6C34878D82A}">
+                    <a16:rowId xmlns:a16="http://schemas.microsoft.com/office/drawing/2014/main" val="10005"/>
+                  </a:ext>
+                </a:extLst>
               </a:tr>
               <a:tr h="365760">
                 <a:tc>
@@ -3944,7 +4008,7 @@
                       <a:pPr>
                         <a:defRPr sz="1200">
                           <a:solidFill>
-                            <a:srgbClr val="FFFFFF"/>
+                            <a:srgbClr val="000000"/>
                           </a:solidFill>
                         </a:defRPr>
                       </a:pPr>
@@ -3955,7 +4019,7 @@
                   </a:txBody>
                   <a:tcPr>
                     <a:solidFill>
-                      <a:srgbClr val="222238"/>
+                      <a:srgbClr val="FFFFFF"/>
                     </a:solidFill>
                   </a:tcPr>
                 </a:tc>
@@ -3967,7 +4031,7 @@
                       <a:pPr>
                         <a:defRPr sz="1200">
                           <a:solidFill>
-                            <a:srgbClr val="FFFFFF"/>
+                            <a:srgbClr val="000000"/>
                           </a:solidFill>
                         </a:defRPr>
                       </a:pPr>
@@ -3978,7 +4042,7 @@
                   </a:txBody>
                   <a:tcPr>
                     <a:solidFill>
-                      <a:srgbClr val="222238"/>
+                      <a:srgbClr val="FFFFFF"/>
                     </a:solidFill>
                   </a:tcPr>
                 </a:tc>
@@ -3990,7 +4054,7 @@
                       <a:pPr>
                         <a:defRPr sz="1200">
                           <a:solidFill>
-                            <a:srgbClr val="FFFFFF"/>
+                            <a:srgbClr val="000000"/>
                           </a:solidFill>
                         </a:defRPr>
                       </a:pPr>
@@ -4001,7 +4065,7 @@
                   </a:txBody>
                   <a:tcPr>
                     <a:solidFill>
-                      <a:srgbClr val="222238"/>
+                      <a:srgbClr val="FFFFFF"/>
                     </a:solidFill>
                   </a:tcPr>
                 </a:tc>
@@ -4013,7 +4077,7 @@
                       <a:pPr>
                         <a:defRPr sz="1200">
                           <a:solidFill>
-                            <a:srgbClr val="FFFFFF"/>
+                            <a:srgbClr val="000000"/>
                           </a:solidFill>
                         </a:defRPr>
                       </a:pPr>
@@ -4024,10 +4088,15 @@
                   </a:txBody>
                   <a:tcPr>
                     <a:solidFill>
-                      <a:srgbClr val="222238"/>
-                    </a:solidFill>
-                  </a:tcPr>
-                </a:tc>
+                      <a:srgbClr val="FFFFFF"/>
+                    </a:solidFill>
+                  </a:tcPr>
+                </a:tc>
+                <a:extLst>
+                  <a:ext uri="{0D108BD9-81ED-4DB2-BD59-A6C34878D82A}">
+                    <a16:rowId xmlns:a16="http://schemas.microsoft.com/office/drawing/2014/main" val="10006"/>
+                  </a:ext>
+                </a:extLst>
               </a:tr>
               <a:tr h="365760">
                 <a:tc>
@@ -4038,7 +4107,7 @@
                       <a:pPr>
                         <a:defRPr sz="1200">
                           <a:solidFill>
-                            <a:srgbClr val="FFFFFF"/>
+                            <a:srgbClr val="000000"/>
                           </a:solidFill>
                         </a:defRPr>
                       </a:pPr>
@@ -4049,7 +4118,7 @@
                   </a:txBody>
                   <a:tcPr>
                     <a:solidFill>
-                      <a:srgbClr val="2A2A40"/>
+                      <a:srgbClr val="F0F0F0"/>
                     </a:solidFill>
                   </a:tcPr>
                 </a:tc>
@@ -4061,15 +4130,16 @@
                       <a:pPr>
                         <a:defRPr sz="1200">
                           <a:solidFill>
-                            <a:srgbClr val="FFFFFF"/>
-                          </a:solidFill>
-                        </a:defRPr>
-                      </a:pPr>
-                    </a:p>
-                  </a:txBody>
-                  <a:tcPr>
-                    <a:solidFill>
-                      <a:srgbClr val="2A2A40"/>
+                            <a:srgbClr val="000000"/>
+                          </a:solidFill>
+                        </a:defRPr>
+                      </a:pPr>
+                      <a:endParaRPr/>
+                    </a:p>
+                  </a:txBody>
+                  <a:tcPr>
+                    <a:solidFill>
+                      <a:srgbClr val="F0F0F0"/>
                     </a:solidFill>
                   </a:tcPr>
                 </a:tc>
@@ -4081,7 +4151,7 @@
                       <a:pPr>
                         <a:defRPr sz="1200">
                           <a:solidFill>
-                            <a:srgbClr val="FFFFFF"/>
+                            <a:srgbClr val="000000"/>
                           </a:solidFill>
                         </a:defRPr>
                       </a:pPr>
@@ -4092,7 +4162,7 @@
                   </a:txBody>
                   <a:tcPr>
                     <a:solidFill>
-                      <a:srgbClr val="2A2A40"/>
+                      <a:srgbClr val="F0F0F0"/>
                     </a:solidFill>
                   </a:tcPr>
                 </a:tc>
@@ -4104,7 +4174,7 @@
                       <a:pPr>
                         <a:defRPr sz="1200">
                           <a:solidFill>
-                            <a:srgbClr val="FFFFFF"/>
+                            <a:srgbClr val="000000"/>
                           </a:solidFill>
                         </a:defRPr>
                       </a:pPr>
@@ -4115,10 +4185,15 @@
                   </a:txBody>
                   <a:tcPr>
                     <a:solidFill>
-                      <a:srgbClr val="2A2A40"/>
-                    </a:solidFill>
-                  </a:tcPr>
-                </a:tc>
+                      <a:srgbClr val="F0F0F0"/>
+                    </a:solidFill>
+                  </a:tcPr>
+                </a:tc>
+                <a:extLst>
+                  <a:ext uri="{0D108BD9-81ED-4DB2-BD59-A6C34878D82A}">
+                    <a16:rowId xmlns:a16="http://schemas.microsoft.com/office/drawing/2014/main" val="10007"/>
+                  </a:ext>
+                </a:extLst>
               </a:tr>
             </a:tbl>
           </a:graphicData>
@@ -4133,12 +4208,12 @@
 </file>
 
 <file path=ppt/slides/slide11.xml><?xml version="1.0" encoding="utf-8"?>
-<p:sld xmlns:a="http://schemas.openxmlformats.org/drawingml/2006/main" xmlns:p="http://schemas.openxmlformats.org/presentationml/2006/main" xmlns:r="http://schemas.openxmlformats.org/officeDocument/2006/relationships">
+<p:sld xmlns:a="http://schemas.openxmlformats.org/drawingml/2006/main" xmlns:r="http://schemas.openxmlformats.org/officeDocument/2006/relationships" xmlns:p="http://schemas.openxmlformats.org/presentationml/2006/main">
   <p:cSld>
     <p:bg>
       <p:bgPr>
         <a:solidFill>
-          <a:srgbClr val="1B1B2F"/>
+          <a:srgbClr val="FFFFFF"/>
         </a:solidFill>
         <a:effectLst/>
       </p:bgPr>
@@ -4149,7 +4224,14 @@
         <p:cNvGrpSpPr/>
         <p:nvPr/>
       </p:nvGrpSpPr>
-      <p:grpSpPr/>
+      <p:grpSpPr>
+        <a:xfrm>
+          <a:off x="0" y="0"/>
+          <a:ext cx="0" cy="0"/>
+          <a:chOff x="0" y="0"/>
+          <a:chExt cx="0" cy="0"/>
+        </a:xfrm>
+      </p:grpSpPr>
       <p:sp>
         <p:nvSpPr>
           <p:cNvPr id="2" name="TextBox 1"/>
@@ -4175,7 +4257,7 @@
             <a:pPr algn="l">
               <a:defRPr sz="2800" b="1">
                 <a:solidFill>
-                  <a:srgbClr val="007BFF"/>
+                  <a:srgbClr val="000000"/>
                 </a:solidFill>
               </a:defRPr>
             </a:pPr>
@@ -4204,8 +4286,20 @@
                 <a:tableStyleId>{5C22544A-7EE6-4342-B048-85BDC9FD1C3A}</a:tableStyleId>
               </a:tblPr>
               <a:tblGrid>
-                <a:gridCol w="4114800"/>
-                <a:gridCol w="4114800"/>
+                <a:gridCol w="4114800">
+                  <a:extLst>
+                    <a:ext uri="{9D8B030D-6E8A-4147-A177-3AD203B41FA5}">
+                      <a16:colId xmlns:a16="http://schemas.microsoft.com/office/drawing/2014/main" val="20000"/>
+                    </a:ext>
+                  </a:extLst>
+                </a:gridCol>
+                <a:gridCol w="4114800">
+                  <a:extLst>
+                    <a:ext uri="{9D8B030D-6E8A-4147-A177-3AD203B41FA5}">
+                      <a16:colId xmlns:a16="http://schemas.microsoft.com/office/drawing/2014/main" val="20001"/>
+                    </a:ext>
+                  </a:extLst>
+                </a:gridCol>
               </a:tblGrid>
               <a:tr h="365760">
                 <a:tc>
@@ -4227,7 +4321,7 @@
                   </a:txBody>
                   <a:tcPr>
                     <a:solidFill>
-                      <a:srgbClr val="007BFF"/>
+                      <a:srgbClr val="000000"/>
                     </a:solidFill>
                   </a:tcPr>
                 </a:tc>
@@ -4250,10 +4344,15 @@
                   </a:txBody>
                   <a:tcPr>
                     <a:solidFill>
-                      <a:srgbClr val="007BFF"/>
-                    </a:solidFill>
-                  </a:tcPr>
-                </a:tc>
+                      <a:srgbClr val="000000"/>
+                    </a:solidFill>
+                  </a:tcPr>
+                </a:tc>
+                <a:extLst>
+                  <a:ext uri="{0D108BD9-81ED-4DB2-BD59-A6C34878D82A}">
+                    <a16:rowId xmlns:a16="http://schemas.microsoft.com/office/drawing/2014/main" val="10000"/>
+                  </a:ext>
+                </a:extLst>
               </a:tr>
               <a:tr h="365760">
                 <a:tc>
@@ -4264,7 +4363,7 @@
                       <a:pPr>
                         <a:defRPr sz="1200">
                           <a:solidFill>
-                            <a:srgbClr val="FFFFFF"/>
+                            <a:srgbClr val="000000"/>
                           </a:solidFill>
                         </a:defRPr>
                       </a:pPr>
@@ -4275,7 +4374,7 @@
                   </a:txBody>
                   <a:tcPr>
                     <a:solidFill>
-                      <a:srgbClr val="2A2A40"/>
+                      <a:srgbClr val="F0F0F0"/>
                     </a:solidFill>
                   </a:tcPr>
                 </a:tc>
@@ -4287,7 +4386,7 @@
                       <a:pPr>
                         <a:defRPr sz="1200">
                           <a:solidFill>
-                            <a:srgbClr val="FFFFFF"/>
+                            <a:srgbClr val="000000"/>
                           </a:solidFill>
                         </a:defRPr>
                       </a:pPr>
@@ -4298,10 +4397,15 @@
                   </a:txBody>
                   <a:tcPr>
                     <a:solidFill>
-                      <a:srgbClr val="2A2A40"/>
-                    </a:solidFill>
-                  </a:tcPr>
-                </a:tc>
+                      <a:srgbClr val="F0F0F0"/>
+                    </a:solidFill>
+                  </a:tcPr>
+                </a:tc>
+                <a:extLst>
+                  <a:ext uri="{0D108BD9-81ED-4DB2-BD59-A6C34878D82A}">
+                    <a16:rowId xmlns:a16="http://schemas.microsoft.com/office/drawing/2014/main" val="10001"/>
+                  </a:ext>
+                </a:extLst>
               </a:tr>
               <a:tr h="365760">
                 <a:tc>
@@ -4312,7 +4416,7 @@
                       <a:pPr>
                         <a:defRPr sz="1200">
                           <a:solidFill>
-                            <a:srgbClr val="FFFFFF"/>
+                            <a:srgbClr val="000000"/>
                           </a:solidFill>
                         </a:defRPr>
                       </a:pPr>
@@ -4323,7 +4427,7 @@
                   </a:txBody>
                   <a:tcPr>
                     <a:solidFill>
-                      <a:srgbClr val="222238"/>
+                      <a:srgbClr val="FFFFFF"/>
                     </a:solidFill>
                   </a:tcPr>
                 </a:tc>
@@ -4335,7 +4439,7 @@
                       <a:pPr>
                         <a:defRPr sz="1200">
                           <a:solidFill>
-                            <a:srgbClr val="FFFFFF"/>
+                            <a:srgbClr val="000000"/>
                           </a:solidFill>
                         </a:defRPr>
                       </a:pPr>
@@ -4346,10 +4450,15 @@
                   </a:txBody>
                   <a:tcPr>
                     <a:solidFill>
-                      <a:srgbClr val="222238"/>
-                    </a:solidFill>
-                  </a:tcPr>
-                </a:tc>
+                      <a:srgbClr val="FFFFFF"/>
+                    </a:solidFill>
+                  </a:tcPr>
+                </a:tc>
+                <a:extLst>
+                  <a:ext uri="{0D108BD9-81ED-4DB2-BD59-A6C34878D82A}">
+                    <a16:rowId xmlns:a16="http://schemas.microsoft.com/office/drawing/2014/main" val="10002"/>
+                  </a:ext>
+                </a:extLst>
               </a:tr>
               <a:tr h="365760">
                 <a:tc>
@@ -4360,7 +4469,7 @@
                       <a:pPr>
                         <a:defRPr sz="1200">
                           <a:solidFill>
-                            <a:srgbClr val="FFFFFF"/>
+                            <a:srgbClr val="000000"/>
                           </a:solidFill>
                         </a:defRPr>
                       </a:pPr>
@@ -4371,7 +4480,7 @@
                   </a:txBody>
                   <a:tcPr>
                     <a:solidFill>
-                      <a:srgbClr val="2A2A40"/>
+                      <a:srgbClr val="F0F0F0"/>
                     </a:solidFill>
                   </a:tcPr>
                 </a:tc>
@@ -4383,7 +4492,7 @@
                       <a:pPr>
                         <a:defRPr sz="1200">
                           <a:solidFill>
-                            <a:srgbClr val="FFFFFF"/>
+                            <a:srgbClr val="000000"/>
                           </a:solidFill>
                         </a:defRPr>
                       </a:pPr>
@@ -4394,10 +4503,15 @@
                   </a:txBody>
                   <a:tcPr>
                     <a:solidFill>
-                      <a:srgbClr val="2A2A40"/>
-                    </a:solidFill>
-                  </a:tcPr>
-                </a:tc>
+                      <a:srgbClr val="F0F0F0"/>
+                    </a:solidFill>
+                  </a:tcPr>
+                </a:tc>
+                <a:extLst>
+                  <a:ext uri="{0D108BD9-81ED-4DB2-BD59-A6C34878D82A}">
+                    <a16:rowId xmlns:a16="http://schemas.microsoft.com/office/drawing/2014/main" val="10003"/>
+                  </a:ext>
+                </a:extLst>
               </a:tr>
               <a:tr h="365760">
                 <a:tc>
@@ -4408,7 +4522,7 @@
                       <a:pPr>
                         <a:defRPr sz="1200">
                           <a:solidFill>
-                            <a:srgbClr val="FFFFFF"/>
+                            <a:srgbClr val="000000"/>
                           </a:solidFill>
                         </a:defRPr>
                       </a:pPr>
@@ -4419,7 +4533,7 @@
                   </a:txBody>
                   <a:tcPr>
                     <a:solidFill>
-                      <a:srgbClr val="222238"/>
+                      <a:srgbClr val="FFFFFF"/>
                     </a:solidFill>
                   </a:tcPr>
                 </a:tc>
@@ -4431,7 +4545,7 @@
                       <a:pPr>
                         <a:defRPr sz="1200">
                           <a:solidFill>
-                            <a:srgbClr val="FFFFFF"/>
+                            <a:srgbClr val="000000"/>
                           </a:solidFill>
                         </a:defRPr>
                       </a:pPr>
@@ -4442,10 +4556,15 @@
                   </a:txBody>
                   <a:tcPr>
                     <a:solidFill>
-                      <a:srgbClr val="222238"/>
-                    </a:solidFill>
-                  </a:tcPr>
-                </a:tc>
+                      <a:srgbClr val="FFFFFF"/>
+                    </a:solidFill>
+                  </a:tcPr>
+                </a:tc>
+                <a:extLst>
+                  <a:ext uri="{0D108BD9-81ED-4DB2-BD59-A6C34878D82A}">
+                    <a16:rowId xmlns:a16="http://schemas.microsoft.com/office/drawing/2014/main" val="10004"/>
+                  </a:ext>
+                </a:extLst>
               </a:tr>
               <a:tr h="365760">
                 <a:tc>
@@ -4456,7 +4575,7 @@
                       <a:pPr>
                         <a:defRPr sz="1200">
                           <a:solidFill>
-                            <a:srgbClr val="FFFFFF"/>
+                            <a:srgbClr val="000000"/>
                           </a:solidFill>
                         </a:defRPr>
                       </a:pPr>
@@ -4467,7 +4586,7 @@
                   </a:txBody>
                   <a:tcPr>
                     <a:solidFill>
-                      <a:srgbClr val="2A2A40"/>
+                      <a:srgbClr val="F0F0F0"/>
                     </a:solidFill>
                   </a:tcPr>
                 </a:tc>
@@ -4479,7 +4598,7 @@
                       <a:pPr>
                         <a:defRPr sz="1200">
                           <a:solidFill>
-                            <a:srgbClr val="FFFFFF"/>
+                            <a:srgbClr val="000000"/>
                           </a:solidFill>
                         </a:defRPr>
                       </a:pPr>
@@ -4490,10 +4609,15 @@
                   </a:txBody>
                   <a:tcPr>
                     <a:solidFill>
-                      <a:srgbClr val="2A2A40"/>
-                    </a:solidFill>
-                  </a:tcPr>
-                </a:tc>
+                      <a:srgbClr val="F0F0F0"/>
+                    </a:solidFill>
+                  </a:tcPr>
+                </a:tc>
+                <a:extLst>
+                  <a:ext uri="{0D108BD9-81ED-4DB2-BD59-A6C34878D82A}">
+                    <a16:rowId xmlns:a16="http://schemas.microsoft.com/office/drawing/2014/main" val="10005"/>
+                  </a:ext>
+                </a:extLst>
               </a:tr>
             </a:tbl>
           </a:graphicData>
@@ -4508,12 +4632,12 @@
 </file>
 
 <file path=ppt/slides/slide12.xml><?xml version="1.0" encoding="utf-8"?>
-<p:sld xmlns:a="http://schemas.openxmlformats.org/drawingml/2006/main" xmlns:p="http://schemas.openxmlformats.org/presentationml/2006/main" xmlns:r="http://schemas.openxmlformats.org/officeDocument/2006/relationships">
+<p:sld xmlns:a="http://schemas.openxmlformats.org/drawingml/2006/main" xmlns:r="http://schemas.openxmlformats.org/officeDocument/2006/relationships" xmlns:p="http://schemas.openxmlformats.org/presentationml/2006/main">
   <p:cSld>
     <p:bg>
       <p:bgPr>
         <a:solidFill>
-          <a:srgbClr val="1B1B2F"/>
+          <a:srgbClr val="FFFFFF"/>
         </a:solidFill>
         <a:effectLst/>
       </p:bgPr>
@@ -4524,7 +4648,14 @@
         <p:cNvGrpSpPr/>
         <p:nvPr/>
       </p:nvGrpSpPr>
-      <p:grpSpPr/>
+      <p:grpSpPr>
+        <a:xfrm>
+          <a:off x="0" y="0"/>
+          <a:ext cx="0" cy="0"/>
+          <a:chOff x="0" y="0"/>
+          <a:chExt cx="0" cy="0"/>
+        </a:xfrm>
+      </p:grpSpPr>
       <p:sp>
         <p:nvSpPr>
           <p:cNvPr id="2" name="TextBox 1"/>
@@ -4550,7 +4681,7 @@
             <a:pPr algn="ctr">
               <a:defRPr sz="3600" b="1">
                 <a:solidFill>
-                  <a:srgbClr val="007BFF"/>
+                  <a:srgbClr val="000000"/>
                 </a:solidFill>
               </a:defRPr>
             </a:pPr>
@@ -4569,12 +4700,12 @@
 </file>
 
 <file path=ppt/slides/slide13.xml><?xml version="1.0" encoding="utf-8"?>
-<p:sld xmlns:a="http://schemas.openxmlformats.org/drawingml/2006/main" xmlns:p="http://schemas.openxmlformats.org/presentationml/2006/main" xmlns:r="http://schemas.openxmlformats.org/officeDocument/2006/relationships">
+<p:sld xmlns:a="http://schemas.openxmlformats.org/drawingml/2006/main" xmlns:r="http://schemas.openxmlformats.org/officeDocument/2006/relationships" xmlns:p="http://schemas.openxmlformats.org/presentationml/2006/main">
   <p:cSld>
     <p:bg>
       <p:bgPr>
         <a:solidFill>
-          <a:srgbClr val="1B1B2F"/>
+          <a:srgbClr val="FFFFFF"/>
         </a:solidFill>
         <a:effectLst/>
       </p:bgPr>
@@ -4585,7 +4716,14 @@
         <p:cNvGrpSpPr/>
         <p:nvPr/>
       </p:nvGrpSpPr>
-      <p:grpSpPr/>
+      <p:grpSpPr>
+        <a:xfrm>
+          <a:off x="0" y="0"/>
+          <a:ext cx="0" cy="0"/>
+          <a:chOff x="0" y="0"/>
+          <a:chExt cx="0" cy="0"/>
+        </a:xfrm>
+      </p:grpSpPr>
       <p:sp>
         <p:nvSpPr>
           <p:cNvPr id="2" name="TextBox 1"/>
@@ -4611,7 +4749,7 @@
             <a:pPr algn="l">
               <a:defRPr sz="2800" b="1">
                 <a:solidFill>
-                  <a:srgbClr val="007BFF"/>
+                  <a:srgbClr val="000000"/>
                 </a:solidFill>
               </a:defRPr>
             </a:pPr>
@@ -4636,7 +4774,7 @@
             <a:avLst/>
           </a:prstGeom>
           <a:solidFill>
-            <a:srgbClr val="007BFF"/>
+            <a:srgbClr val="000000"/>
           </a:solidFill>
           <a:ln>
             <a:noFill/>
@@ -4661,6 +4799,7 @@
           <a:lstStyle/>
           <a:p>
             <a:pPr algn="ctr"/>
+            <a:endParaRPr/>
           </a:p>
         </p:txBody>
       </p:sp>
@@ -4692,7 +4831,7 @@
               </a:spcAft>
               <a:defRPr sz="1600">
                 <a:solidFill>
-                  <a:srgbClr val="FFFFFF"/>
+                  <a:srgbClr val="000000"/>
                 </a:solidFill>
               </a:defRPr>
             </a:pPr>
@@ -4707,7 +4846,7 @@
               </a:spcAft>
               <a:defRPr sz="1600">
                 <a:solidFill>
-                  <a:srgbClr val="FFFFFF"/>
+                  <a:srgbClr val="000000"/>
                 </a:solidFill>
               </a:defRPr>
             </a:pPr>
@@ -4722,7 +4861,7 @@
               </a:spcAft>
               <a:defRPr sz="1600">
                 <a:solidFill>
-                  <a:srgbClr val="FFFFFF"/>
+                  <a:srgbClr val="000000"/>
                 </a:solidFill>
               </a:defRPr>
             </a:pPr>
@@ -4737,7 +4876,7 @@
               </a:spcAft>
               <a:defRPr sz="1600">
                 <a:solidFill>
-                  <a:srgbClr val="FFFFFF"/>
+                  <a:srgbClr val="000000"/>
                 </a:solidFill>
               </a:defRPr>
             </a:pPr>
@@ -4752,7 +4891,7 @@
               </a:spcAft>
               <a:defRPr sz="1600">
                 <a:solidFill>
-                  <a:srgbClr val="FFFFFF"/>
+                  <a:srgbClr val="000000"/>
                 </a:solidFill>
               </a:defRPr>
             </a:pPr>
@@ -4771,12 +4910,12 @@
 </file>
 
 <file path=ppt/slides/slide14.xml><?xml version="1.0" encoding="utf-8"?>
-<p:sld xmlns:a="http://schemas.openxmlformats.org/drawingml/2006/main" xmlns:p="http://schemas.openxmlformats.org/presentationml/2006/main" xmlns:r="http://schemas.openxmlformats.org/officeDocument/2006/relationships">
+<p:sld xmlns:a="http://schemas.openxmlformats.org/drawingml/2006/main" xmlns:r="http://schemas.openxmlformats.org/officeDocument/2006/relationships" xmlns:p="http://schemas.openxmlformats.org/presentationml/2006/main">
   <p:cSld>
     <p:bg>
       <p:bgPr>
         <a:solidFill>
-          <a:srgbClr val="1B1B2F"/>
+          <a:srgbClr val="FFFFFF"/>
         </a:solidFill>
         <a:effectLst/>
       </p:bgPr>
@@ -4787,7 +4926,14 @@
         <p:cNvGrpSpPr/>
         <p:nvPr/>
       </p:nvGrpSpPr>
-      <p:grpSpPr/>
+      <p:grpSpPr>
+        <a:xfrm>
+          <a:off x="0" y="0"/>
+          <a:ext cx="0" cy="0"/>
+          <a:chOff x="0" y="0"/>
+          <a:chExt cx="0" cy="0"/>
+        </a:xfrm>
+      </p:grpSpPr>
       <p:sp>
         <p:nvSpPr>
           <p:cNvPr id="2" name="TextBox 1"/>
@@ -4813,7 +4959,7 @@
             <a:pPr algn="l">
               <a:defRPr sz="2800" b="1">
                 <a:solidFill>
-                  <a:srgbClr val="007BFF"/>
+                  <a:srgbClr val="000000"/>
                 </a:solidFill>
               </a:defRPr>
             </a:pPr>
@@ -4838,7 +4984,7 @@
             <a:avLst/>
           </a:prstGeom>
           <a:solidFill>
-            <a:srgbClr val="007BFF"/>
+            <a:srgbClr val="000000"/>
           </a:solidFill>
           <a:ln>
             <a:noFill/>
@@ -4863,6 +5009,7 @@
           <a:lstStyle/>
           <a:p>
             <a:pPr algn="ctr"/>
+            <a:endParaRPr/>
           </a:p>
         </p:txBody>
       </p:sp>
@@ -4894,7 +5041,7 @@
               </a:spcAft>
               <a:defRPr sz="1600">
                 <a:solidFill>
-                  <a:srgbClr val="FFFFFF"/>
+                  <a:srgbClr val="000000"/>
                 </a:solidFill>
               </a:defRPr>
             </a:pPr>
@@ -4909,7 +5056,7 @@
               </a:spcAft>
               <a:defRPr sz="1600">
                 <a:solidFill>
-                  <a:srgbClr val="FFFFFF"/>
+                  <a:srgbClr val="000000"/>
                 </a:solidFill>
               </a:defRPr>
             </a:pPr>
@@ -4924,7 +5071,7 @@
               </a:spcAft>
               <a:defRPr sz="1600">
                 <a:solidFill>
-                  <a:srgbClr val="FFFFFF"/>
+                  <a:srgbClr val="000000"/>
                 </a:solidFill>
               </a:defRPr>
             </a:pPr>
@@ -4939,7 +5086,7 @@
               </a:spcAft>
               <a:defRPr sz="1600">
                 <a:solidFill>
-                  <a:srgbClr val="FFFFFF"/>
+                  <a:srgbClr val="000000"/>
                 </a:solidFill>
               </a:defRPr>
             </a:pPr>
@@ -4954,7 +5101,7 @@
               </a:spcAft>
               <a:defRPr sz="1600">
                 <a:solidFill>
-                  <a:srgbClr val="FFFFFF"/>
+                  <a:srgbClr val="000000"/>
                 </a:solidFill>
               </a:defRPr>
             </a:pPr>
@@ -4969,7 +5116,7 @@
               </a:spcAft>
               <a:defRPr sz="1600">
                 <a:solidFill>
-                  <a:srgbClr val="FFFFFF"/>
+                  <a:srgbClr val="000000"/>
                 </a:solidFill>
               </a:defRPr>
             </a:pPr>
@@ -4988,12 +5135,12 @@
 </file>
 
 <file path=ppt/slides/slide15.xml><?xml version="1.0" encoding="utf-8"?>
-<p:sld xmlns:a="http://schemas.openxmlformats.org/drawingml/2006/main" xmlns:p="http://schemas.openxmlformats.org/presentationml/2006/main" xmlns:r="http://schemas.openxmlformats.org/officeDocument/2006/relationships">
+<p:sld xmlns:a="http://schemas.openxmlformats.org/drawingml/2006/main" xmlns:r="http://schemas.openxmlformats.org/officeDocument/2006/relationships" xmlns:p="http://schemas.openxmlformats.org/presentationml/2006/main">
   <p:cSld>
     <p:bg>
       <p:bgPr>
         <a:solidFill>
-          <a:srgbClr val="1B1B2F"/>
+          <a:srgbClr val="FFFFFF"/>
         </a:solidFill>
         <a:effectLst/>
       </p:bgPr>
@@ -5004,7 +5151,14 @@
         <p:cNvGrpSpPr/>
         <p:nvPr/>
       </p:nvGrpSpPr>
-      <p:grpSpPr/>
+      <p:grpSpPr>
+        <a:xfrm>
+          <a:off x="0" y="0"/>
+          <a:ext cx="0" cy="0"/>
+          <a:chOff x="0" y="0"/>
+          <a:chExt cx="0" cy="0"/>
+        </a:xfrm>
+      </p:grpSpPr>
       <p:sp>
         <p:nvSpPr>
           <p:cNvPr id="2" name="TextBox 1"/>
@@ -5030,7 +5184,7 @@
             <a:pPr algn="ctr">
               <a:defRPr sz="3200" b="1">
                 <a:solidFill>
-                  <a:srgbClr val="007BFF"/>
+                  <a:srgbClr val="000000"/>
                 </a:solidFill>
               </a:defRPr>
             </a:pPr>
@@ -5065,7 +5219,7 @@
             <a:pPr algn="ctr">
               <a:defRPr sz="1800" b="0">
                 <a:solidFill>
-                  <a:srgbClr val="E0E0E0"/>
+                  <a:srgbClr val="555555"/>
                 </a:solidFill>
               </a:defRPr>
             </a:pPr>
@@ -5100,7 +5254,7 @@
             <a:pPr algn="ctr">
               <a:defRPr sz="1600" b="0">
                 <a:solidFill>
-                  <a:srgbClr val="FFFFFF"/>
+                  <a:srgbClr val="000000"/>
                 </a:solidFill>
               </a:defRPr>
             </a:pPr>
@@ -5135,7 +5289,7 @@
             <a:pPr algn="ctr">
               <a:defRPr sz="1400" b="0">
                 <a:solidFill>
-                  <a:srgbClr val="E0E0E0"/>
+                  <a:srgbClr val="555555"/>
                 </a:solidFill>
               </a:defRPr>
             </a:pPr>
@@ -5154,12 +5308,12 @@
 </file>
 
 <file path=ppt/slides/slide2.xml><?xml version="1.0" encoding="utf-8"?>
-<p:sld xmlns:a="http://schemas.openxmlformats.org/drawingml/2006/main" xmlns:p="http://schemas.openxmlformats.org/presentationml/2006/main" xmlns:r="http://schemas.openxmlformats.org/officeDocument/2006/relationships">
+<p:sld xmlns:a="http://schemas.openxmlformats.org/drawingml/2006/main" xmlns:r="http://schemas.openxmlformats.org/officeDocument/2006/relationships" xmlns:p="http://schemas.openxmlformats.org/presentationml/2006/main">
   <p:cSld>
     <p:bg>
       <p:bgPr>
         <a:solidFill>
-          <a:srgbClr val="1B1B2F"/>
+          <a:srgbClr val="FFFFFF"/>
         </a:solidFill>
         <a:effectLst/>
       </p:bgPr>
@@ -5170,7 +5324,14 @@
         <p:cNvGrpSpPr/>
         <p:nvPr/>
       </p:nvGrpSpPr>
-      <p:grpSpPr/>
+      <p:grpSpPr>
+        <a:xfrm>
+          <a:off x="0" y="0"/>
+          <a:ext cx="0" cy="0"/>
+          <a:chOff x="0" y="0"/>
+          <a:chExt cx="0" cy="0"/>
+        </a:xfrm>
+      </p:grpSpPr>
       <p:sp>
         <p:nvSpPr>
           <p:cNvPr id="2" name="TextBox 1"/>
@@ -5196,7 +5357,7 @@
             <a:pPr algn="l">
               <a:defRPr sz="2800" b="1">
                 <a:solidFill>
-                  <a:srgbClr val="007BFF"/>
+                  <a:srgbClr val="000000"/>
                 </a:solidFill>
               </a:defRPr>
             </a:pPr>
@@ -5221,7 +5382,7 @@
             <a:avLst/>
           </a:prstGeom>
           <a:solidFill>
-            <a:srgbClr val="007BFF"/>
+            <a:srgbClr val="000000"/>
           </a:solidFill>
           <a:ln>
             <a:noFill/>
@@ -5246,6 +5407,7 @@
           <a:lstStyle/>
           <a:p>
             <a:pPr algn="ctr"/>
+            <a:endParaRPr/>
           </a:p>
         </p:txBody>
       </p:sp>
@@ -5277,12 +5439,12 @@
               </a:spcAft>
               <a:defRPr sz="1600">
                 <a:solidFill>
-                  <a:srgbClr val="FFFFFF"/>
+                  <a:srgbClr val="000000"/>
                 </a:solidFill>
               </a:defRPr>
             </a:pPr>
             <a:r>
-              <a:t>• Kyamatu Primary School relies on paper-based records for all operations</a:t>
+              <a:t>• Inefficient manual tracking of student admissions and staff assignments</a:t>
             </a:r>
           </a:p>
           <a:p>
@@ -5292,12 +5454,12 @@
               </a:spcAft>
               <a:defRPr sz="1600">
                 <a:solidFill>
-                  <a:srgbClr val="FFFFFF"/>
+                  <a:srgbClr val="000000"/>
                 </a:solidFill>
               </a:defRPr>
             </a:pPr>
             <a:r>
-              <a:t>• 30% of staff time spent on manual transcription of attendance and grades</a:t>
+              <a:t>• Tedious and error-prone manual computation of CBC grades and report cards</a:t>
             </a:r>
           </a:p>
           <a:p>
@@ -5307,12 +5469,12 @@
               </a:spcAft>
               <a:defRPr sz="1600">
                 <a:solidFill>
-                  <a:srgbClr val="FFFFFF"/>
+                  <a:srgbClr val="000000"/>
                 </a:solidFill>
               </a:defRPr>
             </a:pPr>
             <a:r>
-              <a:t>• Physical records vulnerable to loss, damage, and unauthorized alteration</a:t>
+              <a:t>• Lack of centralized, real-time daily attendance tracking across classes</a:t>
             </a:r>
           </a:p>
           <a:p>
@@ -5322,12 +5484,12 @@
               </a:spcAft>
               <a:defRPr sz="1600">
                 <a:solidFill>
-                  <a:srgbClr val="FFFFFF"/>
+                  <a:srgbClr val="000000"/>
                 </a:solidFill>
               </a:defRPr>
             </a:pPr>
             <a:r>
-              <a:t>• 15% data inconsistency rate across term transitions (MoE, 2023)</a:t>
+              <a:t>• Difficulty in managing, tracking, and reconciling fee invoices and payments</a:t>
             </a:r>
           </a:p>
           <a:p>
@@ -5337,12 +5499,12 @@
               </a:spcAft>
               <a:defRPr sz="1600">
                 <a:solidFill>
-                  <a:srgbClr val="FFFFFF"/>
+                  <a:srgbClr val="000000"/>
                 </a:solidFill>
               </a:defRPr>
             </a:pPr>
             <a:r>
-              <a:t>• Parents have no remote access to student academic or financial data</a:t>
+              <a:t>• Poor communication channels for school announcements and updates</a:t>
             </a:r>
           </a:p>
           <a:p>
@@ -5352,12 +5514,12 @@
               </a:spcAft>
               <a:defRPr sz="1600">
                 <a:solidFill>
-                  <a:srgbClr val="FFFFFF"/>
+                  <a:srgbClr val="000000"/>
                 </a:solidFill>
               </a:defRPr>
             </a:pPr>
             <a:r>
-              <a:t>• No automated CBC competency grading — everything computed by hand</a:t>
+              <a:t>• Complex and disjointed manual scheduling for weekly school timetables</a:t>
             </a:r>
           </a:p>
         </p:txBody>
@@ -5371,12 +5533,12 @@
 </file>
 
 <file path=ppt/slides/slide3.xml><?xml version="1.0" encoding="utf-8"?>
-<p:sld xmlns:a="http://schemas.openxmlformats.org/drawingml/2006/main" xmlns:p="http://schemas.openxmlformats.org/presentationml/2006/main" xmlns:r="http://schemas.openxmlformats.org/officeDocument/2006/relationships">
+<p:sld xmlns:a="http://schemas.openxmlformats.org/drawingml/2006/main" xmlns:r="http://schemas.openxmlformats.org/officeDocument/2006/relationships" xmlns:p="http://schemas.openxmlformats.org/presentationml/2006/main">
   <p:cSld>
     <p:bg>
       <p:bgPr>
         <a:solidFill>
-          <a:srgbClr val="1B1B2F"/>
+          <a:srgbClr val="FFFFFF"/>
         </a:solidFill>
         <a:effectLst/>
       </p:bgPr>
@@ -5387,7 +5549,14 @@
         <p:cNvGrpSpPr/>
         <p:nvPr/>
       </p:nvGrpSpPr>
-      <p:grpSpPr/>
+      <p:grpSpPr>
+        <a:xfrm>
+          <a:off x="0" y="0"/>
+          <a:ext cx="0" cy="0"/>
+          <a:chOff x="0" y="0"/>
+          <a:chExt cx="0" cy="0"/>
+        </a:xfrm>
+      </p:grpSpPr>
       <p:sp>
         <p:nvSpPr>
           <p:cNvPr id="2" name="TextBox 1"/>
@@ -5413,7 +5582,7 @@
             <a:pPr algn="l">
               <a:defRPr sz="2800" b="1">
                 <a:solidFill>
-                  <a:srgbClr val="007BFF"/>
+                  <a:srgbClr val="000000"/>
                 </a:solidFill>
               </a:defRPr>
             </a:pPr>
@@ -5438,7 +5607,7 @@
             <a:avLst/>
           </a:prstGeom>
           <a:solidFill>
-            <a:srgbClr val="007BFF"/>
+            <a:srgbClr val="000000"/>
           </a:solidFill>
           <a:ln>
             <a:noFill/>
@@ -5463,6 +5632,7 @@
           <a:lstStyle/>
           <a:p>
             <a:pPr algn="ctr"/>
+            <a:endParaRPr/>
           </a:p>
         </p:txBody>
       </p:sp>
@@ -5491,7 +5661,7 @@
             <a:pPr algn="l">
               <a:defRPr sz="1800" b="1">
                 <a:solidFill>
-                  <a:srgbClr val="00C853"/>
+                  <a:srgbClr val="000000"/>
                 </a:solidFill>
               </a:defRPr>
             </a:pPr>
@@ -5526,7 +5696,7 @@
             <a:pPr algn="l">
               <a:defRPr sz="1800" b="1">
                 <a:solidFill>
-                  <a:srgbClr val="00C853"/>
+                  <a:srgbClr val="000000"/>
                 </a:solidFill>
               </a:defRPr>
             </a:pPr>
@@ -5545,7 +5715,7 @@
         <p:spPr>
           <a:xfrm>
             <a:off x="548640" y="1554480"/>
-            <a:ext cx="3840480" cy="4572000"/>
+            <a:ext cx="3840480" cy="2277547"/>
           </a:xfrm>
           <a:prstGeom prst="rect">
             <a:avLst/>
@@ -5564,11 +5734,12 @@
               </a:spcAft>
               <a:defRPr sz="1400">
                 <a:solidFill>
-                  <a:srgbClr val="FFFFFF"/>
+                  <a:srgbClr val="000000"/>
                 </a:solidFill>
               </a:defRPr>
             </a:pPr>
             <a:r>
+              <a:rPr dirty="0"/>
               <a:t>• Centralized cloud platform for all school data</a:t>
             </a:r>
           </a:p>
@@ -5579,11 +5750,12 @@
               </a:spcAft>
               <a:defRPr sz="1400">
                 <a:solidFill>
-                  <a:srgbClr val="FFFFFF"/>
+                  <a:srgbClr val="000000"/>
                 </a:solidFill>
               </a:defRPr>
             </a:pPr>
             <a:r>
+              <a:rPr dirty="0"/>
               <a:t>• Automated CBC grading and report card generation</a:t>
             </a:r>
           </a:p>
@@ -5594,11 +5766,12 @@
               </a:spcAft>
               <a:defRPr sz="1400">
                 <a:solidFill>
-                  <a:srgbClr val="FFFFFF"/>
+                  <a:srgbClr val="000000"/>
                 </a:solidFill>
               </a:defRPr>
             </a:pPr>
             <a:r>
+              <a:rPr dirty="0"/>
               <a:t>• Digital attendance tracking with statistics</a:t>
             </a:r>
           </a:p>
@@ -5609,12 +5782,69 @@
               </a:spcAft>
               <a:defRPr sz="1400">
                 <a:solidFill>
-                  <a:srgbClr val="FFFFFF"/>
+                  <a:srgbClr val="000000"/>
                 </a:solidFill>
               </a:defRPr>
             </a:pPr>
             <a:r>
+              <a:rPr dirty="0"/>
               <a:t>• Fee management with payment tracking</a:t>
+            </a:r>
+          </a:p>
+          <a:p>
+            <a:pPr>
+              <a:spcAft>
+                <a:spcPts val="600"/>
+              </a:spcAft>
+              <a:defRPr sz="1400">
+                <a:solidFill>
+                  <a:srgbClr val="000000"/>
+                </a:solidFill>
+              </a:defRPr>
+            </a:pPr>
+            <a:r>
+              <a:rPr dirty="0"/>
+              <a:t>• Timetable scheduling and management</a:t>
+            </a:r>
+          </a:p>
+          <a:p>
+            <a:pPr>
+              <a:spcAft>
+                <a:spcPts val="600"/>
+              </a:spcAft>
+              <a:defRPr sz="1400">
+                <a:solidFill>
+                  <a:srgbClr val="000000"/>
+                </a:solidFill>
+              </a:defRPr>
+            </a:pPr>
+            <a:r>
+              <a:rPr dirty="0"/>
+              <a:t>• Communication tools (</a:t>
+            </a:r>
+            <a:r>
+              <a:rPr dirty="0" err="1"/>
+              <a:t>announcementss</a:t>
+            </a:r>
+            <a:r>
+              <a:rPr dirty="0"/>
+              <a:t>)</a:t>
+            </a:r>
+          </a:p>
+          <a:p>
+            <a:pPr>
+              <a:spcAft>
+                <a:spcPts val="600"/>
+              </a:spcAft>
+              <a:defRPr sz="1400">
+                <a:solidFill>
+                  <a:srgbClr val="000000"/>
+                </a:solidFill>
+              </a:defRPr>
+            </a:pPr>
+            <a:r>
+              <a:rPr dirty="0"/>
+              <a:t>• Role-based access control (Admin, Teacher, etc.)</a:t>
             </a:r>
           </a:p>
         </p:txBody>
@@ -5647,7 +5877,7 @@
               </a:spcAft>
               <a:defRPr sz="1400">
                 <a:solidFill>
-                  <a:srgbClr val="FFFFFF"/>
+                  <a:srgbClr val="000000"/>
                 </a:solidFill>
               </a:defRPr>
             </a:pPr>
@@ -5662,7 +5892,7 @@
               </a:spcAft>
               <a:defRPr sz="1400">
                 <a:solidFill>
-                  <a:srgbClr val="FFFFFF"/>
+                  <a:srgbClr val="000000"/>
                 </a:solidFill>
               </a:defRPr>
             </a:pPr>
@@ -5677,7 +5907,7 @@
               </a:spcAft>
               <a:defRPr sz="1400">
                 <a:solidFill>
-                  <a:srgbClr val="FFFFFF"/>
+                  <a:srgbClr val="000000"/>
                 </a:solidFill>
               </a:defRPr>
             </a:pPr>
@@ -5692,7 +5922,7 @@
               </a:spcAft>
               <a:defRPr sz="1400">
                 <a:solidFill>
-                  <a:srgbClr val="FFFFFF"/>
+                  <a:srgbClr val="000000"/>
                 </a:solidFill>
               </a:defRPr>
             </a:pPr>
@@ -5711,12 +5941,12 @@
 </file>
 
 <file path=ppt/slides/slide4.xml><?xml version="1.0" encoding="utf-8"?>
-<p:sld xmlns:a="http://schemas.openxmlformats.org/drawingml/2006/main" xmlns:p="http://schemas.openxmlformats.org/presentationml/2006/main" xmlns:r="http://schemas.openxmlformats.org/officeDocument/2006/relationships">
+<p:sld xmlns:a="http://schemas.openxmlformats.org/drawingml/2006/main" xmlns:r="http://schemas.openxmlformats.org/officeDocument/2006/relationships" xmlns:p="http://schemas.openxmlformats.org/presentationml/2006/main">
   <p:cSld>
     <p:bg>
       <p:bgPr>
         <a:solidFill>
-          <a:srgbClr val="1B1B2F"/>
+          <a:srgbClr val="FFFFFF"/>
         </a:solidFill>
         <a:effectLst/>
       </p:bgPr>
@@ -5727,7 +5957,14 @@
         <p:cNvGrpSpPr/>
         <p:nvPr/>
       </p:nvGrpSpPr>
-      <p:grpSpPr/>
+      <p:grpSpPr>
+        <a:xfrm>
+          <a:off x="0" y="0"/>
+          <a:ext cx="0" cy="0"/>
+          <a:chOff x="0" y="0"/>
+          <a:chExt cx="0" cy="0"/>
+        </a:xfrm>
+      </p:grpSpPr>
       <p:sp>
         <p:nvSpPr>
           <p:cNvPr id="2" name="TextBox 1"/>
@@ -5753,7 +5990,7 @@
             <a:pPr algn="l">
               <a:defRPr sz="2800" b="1">
                 <a:solidFill>
-                  <a:srgbClr val="007BFF"/>
+                  <a:srgbClr val="000000"/>
                 </a:solidFill>
               </a:defRPr>
             </a:pPr>
@@ -5782,9 +6019,27 @@
                 <a:tableStyleId>{5C22544A-7EE6-4342-B048-85BDC9FD1C3A}</a:tableStyleId>
               </a:tblPr>
               <a:tblGrid>
-                <a:gridCol w="2743200"/>
-                <a:gridCol w="2743200"/>
-                <a:gridCol w="2743200"/>
+                <a:gridCol w="2743200">
+                  <a:extLst>
+                    <a:ext uri="{9D8B030D-6E8A-4147-A177-3AD203B41FA5}">
+                      <a16:colId xmlns:a16="http://schemas.microsoft.com/office/drawing/2014/main" val="20000"/>
+                    </a:ext>
+                  </a:extLst>
+                </a:gridCol>
+                <a:gridCol w="2743200">
+                  <a:extLst>
+                    <a:ext uri="{9D8B030D-6E8A-4147-A177-3AD203B41FA5}">
+                      <a16:colId xmlns:a16="http://schemas.microsoft.com/office/drawing/2014/main" val="20001"/>
+                    </a:ext>
+                  </a:extLst>
+                </a:gridCol>
+                <a:gridCol w="2743200">
+                  <a:extLst>
+                    <a:ext uri="{9D8B030D-6E8A-4147-A177-3AD203B41FA5}">
+                      <a16:colId xmlns:a16="http://schemas.microsoft.com/office/drawing/2014/main" val="20002"/>
+                    </a:ext>
+                  </a:extLst>
+                </a:gridCol>
               </a:tblGrid>
               <a:tr h="365760">
                 <a:tc>
@@ -5806,7 +6061,7 @@
                   </a:txBody>
                   <a:tcPr>
                     <a:solidFill>
-                      <a:srgbClr val="007BFF"/>
+                      <a:srgbClr val="000000"/>
                     </a:solidFill>
                   </a:tcPr>
                 </a:tc>
@@ -5829,7 +6084,7 @@
                   </a:txBody>
                   <a:tcPr>
                     <a:solidFill>
-                      <a:srgbClr val="007BFF"/>
+                      <a:srgbClr val="000000"/>
                     </a:solidFill>
                   </a:tcPr>
                 </a:tc>
@@ -5852,10 +6107,15 @@
                   </a:txBody>
                   <a:tcPr>
                     <a:solidFill>
-                      <a:srgbClr val="007BFF"/>
-                    </a:solidFill>
-                  </a:tcPr>
-                </a:tc>
+                      <a:srgbClr val="000000"/>
+                    </a:solidFill>
+                  </a:tcPr>
+                </a:tc>
+                <a:extLst>
+                  <a:ext uri="{0D108BD9-81ED-4DB2-BD59-A6C34878D82A}">
+                    <a16:rowId xmlns:a16="http://schemas.microsoft.com/office/drawing/2014/main" val="10000"/>
+                  </a:ext>
+                </a:extLst>
               </a:tr>
               <a:tr h="365760">
                 <a:tc>
@@ -5866,7 +6126,7 @@
                       <a:pPr>
                         <a:defRPr sz="1200">
                           <a:solidFill>
-                            <a:srgbClr val="FFFFFF"/>
+                            <a:srgbClr val="000000"/>
                           </a:solidFill>
                         </a:defRPr>
                       </a:pPr>
@@ -5877,7 +6137,7 @@
                   </a:txBody>
                   <a:tcPr>
                     <a:solidFill>
-                      <a:srgbClr val="2A2A40"/>
+                      <a:srgbClr val="F0F0F0"/>
                     </a:solidFill>
                   </a:tcPr>
                 </a:tc>
@@ -5889,7 +6149,7 @@
                       <a:pPr>
                         <a:defRPr sz="1200">
                           <a:solidFill>
-                            <a:srgbClr val="FFFFFF"/>
+                            <a:srgbClr val="000000"/>
                           </a:solidFill>
                         </a:defRPr>
                       </a:pPr>
@@ -5900,7 +6160,7 @@
                   </a:txBody>
                   <a:tcPr>
                     <a:solidFill>
-                      <a:srgbClr val="2A2A40"/>
+                      <a:srgbClr val="F0F0F0"/>
                     </a:solidFill>
                   </a:tcPr>
                 </a:tc>
@@ -5912,7 +6172,7 @@
                       <a:pPr>
                         <a:defRPr sz="1200">
                           <a:solidFill>
-                            <a:srgbClr val="FFFFFF"/>
+                            <a:srgbClr val="000000"/>
                           </a:solidFill>
                         </a:defRPr>
                       </a:pPr>
@@ -5923,10 +6183,15 @@
                   </a:txBody>
                   <a:tcPr>
                     <a:solidFill>
-                      <a:srgbClr val="2A2A40"/>
-                    </a:solidFill>
-                  </a:tcPr>
-                </a:tc>
+                      <a:srgbClr val="F0F0F0"/>
+                    </a:solidFill>
+                  </a:tcPr>
+                </a:tc>
+                <a:extLst>
+                  <a:ext uri="{0D108BD9-81ED-4DB2-BD59-A6C34878D82A}">
+                    <a16:rowId xmlns:a16="http://schemas.microsoft.com/office/drawing/2014/main" val="10001"/>
+                  </a:ext>
+                </a:extLst>
               </a:tr>
               <a:tr h="365760">
                 <a:tc>
@@ -5937,7 +6202,7 @@
                       <a:pPr>
                         <a:defRPr sz="1200">
                           <a:solidFill>
-                            <a:srgbClr val="FFFFFF"/>
+                            <a:srgbClr val="000000"/>
                           </a:solidFill>
                         </a:defRPr>
                       </a:pPr>
@@ -5948,7 +6213,7 @@
                   </a:txBody>
                   <a:tcPr>
                     <a:solidFill>
-                      <a:srgbClr val="222238"/>
+                      <a:srgbClr val="FFFFFF"/>
                     </a:solidFill>
                   </a:tcPr>
                 </a:tc>
@@ -5960,7 +6225,7 @@
                       <a:pPr>
                         <a:defRPr sz="1200">
                           <a:solidFill>
-                            <a:srgbClr val="FFFFFF"/>
+                            <a:srgbClr val="000000"/>
                           </a:solidFill>
                         </a:defRPr>
                       </a:pPr>
@@ -5971,7 +6236,7 @@
                   </a:txBody>
                   <a:tcPr>
                     <a:solidFill>
-                      <a:srgbClr val="222238"/>
+                      <a:srgbClr val="FFFFFF"/>
                     </a:solidFill>
                   </a:tcPr>
                 </a:tc>
@@ -5983,7 +6248,7 @@
                       <a:pPr>
                         <a:defRPr sz="1200">
                           <a:solidFill>
-                            <a:srgbClr val="FFFFFF"/>
+                            <a:srgbClr val="000000"/>
                           </a:solidFill>
                         </a:defRPr>
                       </a:pPr>
@@ -5994,10 +6259,15 @@
                   </a:txBody>
                   <a:tcPr>
                     <a:solidFill>
-                      <a:srgbClr val="222238"/>
-                    </a:solidFill>
-                  </a:tcPr>
-                </a:tc>
+                      <a:srgbClr val="FFFFFF"/>
+                    </a:solidFill>
+                  </a:tcPr>
+                </a:tc>
+                <a:extLst>
+                  <a:ext uri="{0D108BD9-81ED-4DB2-BD59-A6C34878D82A}">
+                    <a16:rowId xmlns:a16="http://schemas.microsoft.com/office/drawing/2014/main" val="10002"/>
+                  </a:ext>
+                </a:extLst>
               </a:tr>
               <a:tr h="365760">
                 <a:tc>
@@ -6008,7 +6278,7 @@
                       <a:pPr>
                         <a:defRPr sz="1200">
                           <a:solidFill>
-                            <a:srgbClr val="FFFFFF"/>
+                            <a:srgbClr val="000000"/>
                           </a:solidFill>
                         </a:defRPr>
                       </a:pPr>
@@ -6019,7 +6289,7 @@
                   </a:txBody>
                   <a:tcPr>
                     <a:solidFill>
-                      <a:srgbClr val="2A2A40"/>
+                      <a:srgbClr val="F0F0F0"/>
                     </a:solidFill>
                   </a:tcPr>
                 </a:tc>
@@ -6031,7 +6301,7 @@
                       <a:pPr>
                         <a:defRPr sz="1200">
                           <a:solidFill>
-                            <a:srgbClr val="FFFFFF"/>
+                            <a:srgbClr val="000000"/>
                           </a:solidFill>
                         </a:defRPr>
                       </a:pPr>
@@ -6042,7 +6312,7 @@
                   </a:txBody>
                   <a:tcPr>
                     <a:solidFill>
-                      <a:srgbClr val="2A2A40"/>
+                      <a:srgbClr val="F0F0F0"/>
                     </a:solidFill>
                   </a:tcPr>
                 </a:tc>
@@ -6054,7 +6324,7 @@
                       <a:pPr>
                         <a:defRPr sz="1200">
                           <a:solidFill>
-                            <a:srgbClr val="FFFFFF"/>
+                            <a:srgbClr val="000000"/>
                           </a:solidFill>
                         </a:defRPr>
                       </a:pPr>
@@ -6065,10 +6335,15 @@
                   </a:txBody>
                   <a:tcPr>
                     <a:solidFill>
-                      <a:srgbClr val="2A2A40"/>
-                    </a:solidFill>
-                  </a:tcPr>
-                </a:tc>
+                      <a:srgbClr val="F0F0F0"/>
+                    </a:solidFill>
+                  </a:tcPr>
+                </a:tc>
+                <a:extLst>
+                  <a:ext uri="{0D108BD9-81ED-4DB2-BD59-A6C34878D82A}">
+                    <a16:rowId xmlns:a16="http://schemas.microsoft.com/office/drawing/2014/main" val="10003"/>
+                  </a:ext>
+                </a:extLst>
               </a:tr>
               <a:tr h="365760">
                 <a:tc>
@@ -6079,7 +6354,7 @@
                       <a:pPr>
                         <a:defRPr sz="1200">
                           <a:solidFill>
-                            <a:srgbClr val="FFFFFF"/>
+                            <a:srgbClr val="000000"/>
                           </a:solidFill>
                         </a:defRPr>
                       </a:pPr>
@@ -6090,7 +6365,7 @@
                   </a:txBody>
                   <a:tcPr>
                     <a:solidFill>
-                      <a:srgbClr val="222238"/>
+                      <a:srgbClr val="FFFFFF"/>
                     </a:solidFill>
                   </a:tcPr>
                 </a:tc>
@@ -6102,7 +6377,7 @@
                       <a:pPr>
                         <a:defRPr sz="1200">
                           <a:solidFill>
-                            <a:srgbClr val="FFFFFF"/>
+                            <a:srgbClr val="000000"/>
                           </a:solidFill>
                         </a:defRPr>
                       </a:pPr>
@@ -6113,7 +6388,7 @@
                   </a:txBody>
                   <a:tcPr>
                     <a:solidFill>
-                      <a:srgbClr val="222238"/>
+                      <a:srgbClr val="FFFFFF"/>
                     </a:solidFill>
                   </a:tcPr>
                 </a:tc>
@@ -6125,7 +6400,7 @@
                       <a:pPr>
                         <a:defRPr sz="1200">
                           <a:solidFill>
-                            <a:srgbClr val="FFFFFF"/>
+                            <a:srgbClr val="000000"/>
                           </a:solidFill>
                         </a:defRPr>
                       </a:pPr>
@@ -6136,10 +6411,15 @@
                   </a:txBody>
                   <a:tcPr>
                     <a:solidFill>
-                      <a:srgbClr val="222238"/>
-                    </a:solidFill>
-                  </a:tcPr>
-                </a:tc>
+                      <a:srgbClr val="FFFFFF"/>
+                    </a:solidFill>
+                  </a:tcPr>
+                </a:tc>
+                <a:extLst>
+                  <a:ext uri="{0D108BD9-81ED-4DB2-BD59-A6C34878D82A}">
+                    <a16:rowId xmlns:a16="http://schemas.microsoft.com/office/drawing/2014/main" val="10004"/>
+                  </a:ext>
+                </a:extLst>
               </a:tr>
               <a:tr h="365760">
                 <a:tc>
@@ -6150,7 +6430,7 @@
                       <a:pPr>
                         <a:defRPr sz="1200">
                           <a:solidFill>
-                            <a:srgbClr val="FFFFFF"/>
+                            <a:srgbClr val="000000"/>
                           </a:solidFill>
                         </a:defRPr>
                       </a:pPr>
@@ -6161,7 +6441,7 @@
                   </a:txBody>
                   <a:tcPr>
                     <a:solidFill>
-                      <a:srgbClr val="2A2A40"/>
+                      <a:srgbClr val="F0F0F0"/>
                     </a:solidFill>
                   </a:tcPr>
                 </a:tc>
@@ -6173,7 +6453,7 @@
                       <a:pPr>
                         <a:defRPr sz="1200">
                           <a:solidFill>
-                            <a:srgbClr val="FFFFFF"/>
+                            <a:srgbClr val="000000"/>
                           </a:solidFill>
                         </a:defRPr>
                       </a:pPr>
@@ -6184,7 +6464,7 @@
                   </a:txBody>
                   <a:tcPr>
                     <a:solidFill>
-                      <a:srgbClr val="2A2A40"/>
+                      <a:srgbClr val="F0F0F0"/>
                     </a:solidFill>
                   </a:tcPr>
                 </a:tc>
@@ -6196,7 +6476,7 @@
                       <a:pPr>
                         <a:defRPr sz="1200">
                           <a:solidFill>
-                            <a:srgbClr val="FFFFFF"/>
+                            <a:srgbClr val="000000"/>
                           </a:solidFill>
                         </a:defRPr>
                       </a:pPr>
@@ -6207,10 +6487,15 @@
                   </a:txBody>
                   <a:tcPr>
                     <a:solidFill>
-                      <a:srgbClr val="2A2A40"/>
-                    </a:solidFill>
-                  </a:tcPr>
-                </a:tc>
+                      <a:srgbClr val="F0F0F0"/>
+                    </a:solidFill>
+                  </a:tcPr>
+                </a:tc>
+                <a:extLst>
+                  <a:ext uri="{0D108BD9-81ED-4DB2-BD59-A6C34878D82A}">
+                    <a16:rowId xmlns:a16="http://schemas.microsoft.com/office/drawing/2014/main" val="10005"/>
+                  </a:ext>
+                </a:extLst>
               </a:tr>
               <a:tr h="365760">
                 <a:tc>
@@ -6221,7 +6506,7 @@
                       <a:pPr>
                         <a:defRPr sz="1200">
                           <a:solidFill>
-                            <a:srgbClr val="FFFFFF"/>
+                            <a:srgbClr val="000000"/>
                           </a:solidFill>
                         </a:defRPr>
                       </a:pPr>
@@ -6232,7 +6517,7 @@
                   </a:txBody>
                   <a:tcPr>
                     <a:solidFill>
-                      <a:srgbClr val="222238"/>
+                      <a:srgbClr val="FFFFFF"/>
                     </a:solidFill>
                   </a:tcPr>
                 </a:tc>
@@ -6244,7 +6529,7 @@
                       <a:pPr>
                         <a:defRPr sz="1200">
                           <a:solidFill>
-                            <a:srgbClr val="FFFFFF"/>
+                            <a:srgbClr val="000000"/>
                           </a:solidFill>
                         </a:defRPr>
                       </a:pPr>
@@ -6255,7 +6540,7 @@
                   </a:txBody>
                   <a:tcPr>
                     <a:solidFill>
-                      <a:srgbClr val="222238"/>
+                      <a:srgbClr val="FFFFFF"/>
                     </a:solidFill>
                   </a:tcPr>
                 </a:tc>
@@ -6267,7 +6552,7 @@
                       <a:pPr>
                         <a:defRPr sz="1200">
                           <a:solidFill>
-                            <a:srgbClr val="FFFFFF"/>
+                            <a:srgbClr val="000000"/>
                           </a:solidFill>
                         </a:defRPr>
                       </a:pPr>
@@ -6278,10 +6563,15 @@
                   </a:txBody>
                   <a:tcPr>
                     <a:solidFill>
-                      <a:srgbClr val="222238"/>
-                    </a:solidFill>
-                  </a:tcPr>
-                </a:tc>
+                      <a:srgbClr val="FFFFFF"/>
+                    </a:solidFill>
+                  </a:tcPr>
+                </a:tc>
+                <a:extLst>
+                  <a:ext uri="{0D108BD9-81ED-4DB2-BD59-A6C34878D82A}">
+                    <a16:rowId xmlns:a16="http://schemas.microsoft.com/office/drawing/2014/main" val="10006"/>
+                  </a:ext>
+                </a:extLst>
               </a:tr>
             </a:tbl>
           </a:graphicData>
@@ -6296,12 +6586,12 @@
 </file>
 
 <file path=ppt/slides/slide5.xml><?xml version="1.0" encoding="utf-8"?>
-<p:sld xmlns:a="http://schemas.openxmlformats.org/drawingml/2006/main" xmlns:p="http://schemas.openxmlformats.org/presentationml/2006/main" xmlns:r="http://schemas.openxmlformats.org/officeDocument/2006/relationships">
+<p:sld xmlns:a="http://schemas.openxmlformats.org/drawingml/2006/main" xmlns:r="http://schemas.openxmlformats.org/officeDocument/2006/relationships" xmlns:p="http://schemas.openxmlformats.org/presentationml/2006/main">
   <p:cSld>
     <p:bg>
       <p:bgPr>
         <a:solidFill>
-          <a:srgbClr val="1B1B2F"/>
+          <a:srgbClr val="FFFFFF"/>
         </a:solidFill>
         <a:effectLst/>
       </p:bgPr>
@@ -6312,7 +6602,14 @@
         <p:cNvGrpSpPr/>
         <p:nvPr/>
       </p:nvGrpSpPr>
-      <p:grpSpPr/>
+      <p:grpSpPr>
+        <a:xfrm>
+          <a:off x="0" y="0"/>
+          <a:ext cx="0" cy="0"/>
+          <a:chOff x="0" y="0"/>
+          <a:chExt cx="0" cy="0"/>
+        </a:xfrm>
+      </p:grpSpPr>
       <p:sp>
         <p:nvSpPr>
           <p:cNvPr id="2" name="TextBox 1"/>
@@ -6338,7 +6635,7 @@
             <a:pPr algn="l">
               <a:defRPr sz="2800" b="1">
                 <a:solidFill>
-                  <a:srgbClr val="007BFF"/>
+                  <a:srgbClr val="000000"/>
                 </a:solidFill>
               </a:defRPr>
             </a:pPr>
@@ -6363,7 +6660,7 @@
             <a:avLst/>
           </a:prstGeom>
           <a:solidFill>
-            <a:srgbClr val="007BFF"/>
+            <a:srgbClr val="000000"/>
           </a:solidFill>
           <a:ln>
             <a:noFill/>
@@ -6388,6 +6685,7 @@
           <a:lstStyle/>
           <a:p>
             <a:pPr algn="ctr"/>
+            <a:endParaRPr/>
           </a:p>
         </p:txBody>
       </p:sp>
@@ -6419,7 +6717,7 @@
               </a:spcAft>
               <a:defRPr sz="1600">
                 <a:solidFill>
-                  <a:srgbClr val="FFFFFF"/>
+                  <a:srgbClr val="000000"/>
                 </a:solidFill>
               </a:defRPr>
             </a:pPr>
@@ -6434,7 +6732,7 @@
               </a:spcAft>
               <a:defRPr sz="1600">
                 <a:solidFill>
-                  <a:srgbClr val="FFFFFF"/>
+                  <a:srgbClr val="000000"/>
                 </a:solidFill>
               </a:defRPr>
             </a:pPr>
@@ -6449,7 +6747,7 @@
               </a:spcAft>
               <a:defRPr sz="1600">
                 <a:solidFill>
-                  <a:srgbClr val="FFFFFF"/>
+                  <a:srgbClr val="000000"/>
                 </a:solidFill>
               </a:defRPr>
             </a:pPr>
@@ -6464,7 +6762,7 @@
               </a:spcAft>
               <a:defRPr sz="1600">
                 <a:solidFill>
-                  <a:srgbClr val="FFFFFF"/>
+                  <a:srgbClr val="000000"/>
                 </a:solidFill>
               </a:defRPr>
             </a:pPr>
@@ -6479,7 +6777,7 @@
               </a:spcAft>
               <a:defRPr sz="1600">
                 <a:solidFill>
-                  <a:srgbClr val="FFFFFF"/>
+                  <a:srgbClr val="000000"/>
                 </a:solidFill>
               </a:defRPr>
             </a:pPr>
@@ -6494,7 +6792,7 @@
               </a:spcAft>
               <a:defRPr sz="1600">
                 <a:solidFill>
-                  <a:srgbClr val="FFFFFF"/>
+                  <a:srgbClr val="000000"/>
                 </a:solidFill>
               </a:defRPr>
             </a:pPr>
@@ -6513,12 +6811,12 @@
 </file>
 
 <file path=ppt/slides/slide6.xml><?xml version="1.0" encoding="utf-8"?>
-<p:sld xmlns:a="http://schemas.openxmlformats.org/drawingml/2006/main" xmlns:p="http://schemas.openxmlformats.org/presentationml/2006/main" xmlns:r="http://schemas.openxmlformats.org/officeDocument/2006/relationships">
+<p:sld xmlns:a="http://schemas.openxmlformats.org/drawingml/2006/main" xmlns:r="http://schemas.openxmlformats.org/officeDocument/2006/relationships" xmlns:p="http://schemas.openxmlformats.org/presentationml/2006/main">
   <p:cSld>
     <p:bg>
       <p:bgPr>
         <a:solidFill>
-          <a:srgbClr val="1B1B2F"/>
+          <a:srgbClr val="FFFFFF"/>
         </a:solidFill>
         <a:effectLst/>
       </p:bgPr>
@@ -6529,7 +6827,14 @@
         <p:cNvGrpSpPr/>
         <p:nvPr/>
       </p:nvGrpSpPr>
-      <p:grpSpPr/>
+      <p:grpSpPr>
+        <a:xfrm>
+          <a:off x="0" y="0"/>
+          <a:ext cx="0" cy="0"/>
+          <a:chOff x="0" y="0"/>
+          <a:chExt cx="0" cy="0"/>
+        </a:xfrm>
+      </p:grpSpPr>
       <p:sp>
         <p:nvSpPr>
           <p:cNvPr id="2" name="TextBox 1"/>
@@ -6555,7 +6860,7 @@
             <a:pPr algn="l">
               <a:defRPr sz="2800" b="1">
                 <a:solidFill>
-                  <a:srgbClr val="007BFF"/>
+                  <a:srgbClr val="000000"/>
                 </a:solidFill>
               </a:defRPr>
             </a:pPr>
@@ -6580,7 +6885,7 @@
             <a:avLst/>
           </a:prstGeom>
           <a:solidFill>
-            <a:srgbClr val="007BFF"/>
+            <a:srgbClr val="000000"/>
           </a:solidFill>
           <a:ln>
             <a:noFill/>
@@ -6605,6 +6910,7 @@
           <a:lstStyle/>
           <a:p>
             <a:pPr algn="ctr"/>
+            <a:endParaRPr/>
           </a:p>
         </p:txBody>
       </p:sp>
@@ -6636,7 +6942,7 @@
               </a:spcAft>
               <a:defRPr sz="1600">
                 <a:solidFill>
-                  <a:srgbClr val="FFFFFF"/>
+                  <a:srgbClr val="000000"/>
                 </a:solidFill>
               </a:defRPr>
             </a:pPr>
@@ -6651,7 +6957,7 @@
               </a:spcAft>
               <a:defRPr sz="1600">
                 <a:solidFill>
-                  <a:srgbClr val="FFFFFF"/>
+                  <a:srgbClr val="000000"/>
                 </a:solidFill>
               </a:defRPr>
             </a:pPr>
@@ -6666,7 +6972,7 @@
               </a:spcAft>
               <a:defRPr sz="1600">
                 <a:solidFill>
-                  <a:srgbClr val="FFFFFF"/>
+                  <a:srgbClr val="000000"/>
                 </a:solidFill>
               </a:defRPr>
             </a:pPr>
@@ -6681,7 +6987,7 @@
               </a:spcAft>
               <a:defRPr sz="1600">
                 <a:solidFill>
-                  <a:srgbClr val="FFFFFF"/>
+                  <a:srgbClr val="000000"/>
                 </a:solidFill>
               </a:defRPr>
             </a:pPr>
@@ -6696,7 +7002,7 @@
               </a:spcAft>
               <a:defRPr sz="1600">
                 <a:solidFill>
-                  <a:srgbClr val="FFFFFF"/>
+                  <a:srgbClr val="000000"/>
                 </a:solidFill>
               </a:defRPr>
             </a:pPr>
@@ -6711,7 +7017,7 @@
               </a:spcAft>
               <a:defRPr sz="1600">
                 <a:solidFill>
-                  <a:srgbClr val="FFFFFF"/>
+                  <a:srgbClr val="000000"/>
                 </a:solidFill>
               </a:defRPr>
             </a:pPr>
@@ -6726,7 +7032,7 @@
               </a:spcAft>
               <a:defRPr sz="1600">
                 <a:solidFill>
-                  <a:srgbClr val="FFFFFF"/>
+                  <a:srgbClr val="000000"/>
                 </a:solidFill>
               </a:defRPr>
             </a:pPr>
@@ -6745,12 +7051,12 @@
 </file>
 
 <file path=ppt/slides/slide7.xml><?xml version="1.0" encoding="utf-8"?>
-<p:sld xmlns:a="http://schemas.openxmlformats.org/drawingml/2006/main" xmlns:p="http://schemas.openxmlformats.org/presentationml/2006/main" xmlns:r="http://schemas.openxmlformats.org/officeDocument/2006/relationships">
+<p:sld xmlns:a="http://schemas.openxmlformats.org/drawingml/2006/main" xmlns:r="http://schemas.openxmlformats.org/officeDocument/2006/relationships" xmlns:p="http://schemas.openxmlformats.org/presentationml/2006/main">
   <p:cSld>
     <p:bg>
       <p:bgPr>
         <a:solidFill>
-          <a:srgbClr val="1B1B2F"/>
+          <a:srgbClr val="FFFFFF"/>
         </a:solidFill>
         <a:effectLst/>
       </p:bgPr>
@@ -6761,7 +7067,14 @@
         <p:cNvGrpSpPr/>
         <p:nvPr/>
       </p:nvGrpSpPr>
-      <p:grpSpPr/>
+      <p:grpSpPr>
+        <a:xfrm>
+          <a:off x="0" y="0"/>
+          <a:ext cx="0" cy="0"/>
+          <a:chOff x="0" y="0"/>
+          <a:chExt cx="0" cy="0"/>
+        </a:xfrm>
+      </p:grpSpPr>
       <p:sp>
         <p:nvSpPr>
           <p:cNvPr id="2" name="TextBox 1"/>
@@ -6787,7 +7100,7 @@
             <a:pPr algn="l">
               <a:defRPr sz="2800" b="1">
                 <a:solidFill>
-                  <a:srgbClr val="007BFF"/>
+                  <a:srgbClr val="000000"/>
                 </a:solidFill>
               </a:defRPr>
             </a:pPr>
@@ -6812,7 +7125,7 @@
             <a:avLst/>
           </a:prstGeom>
           <a:solidFill>
-            <a:srgbClr val="007BFF"/>
+            <a:srgbClr val="000000"/>
           </a:solidFill>
           <a:ln>
             <a:noFill/>
@@ -6837,6 +7150,7 @@
           <a:lstStyle/>
           <a:p>
             <a:pPr algn="ctr"/>
+            <a:endParaRPr/>
           </a:p>
         </p:txBody>
       </p:sp>
@@ -6868,7 +7182,7 @@
               </a:spcAft>
               <a:defRPr sz="1400">
                 <a:solidFill>
-                  <a:srgbClr val="FFFFFF"/>
+                  <a:srgbClr val="000000"/>
                 </a:solidFill>
               </a:defRPr>
             </a:pPr>
@@ -6883,7 +7197,7 @@
               </a:spcAft>
               <a:defRPr sz="1400">
                 <a:solidFill>
-                  <a:srgbClr val="FFFFFF"/>
+                  <a:srgbClr val="000000"/>
                 </a:solidFill>
               </a:defRPr>
             </a:pPr>
@@ -6898,7 +7212,7 @@
               </a:spcAft>
               <a:defRPr sz="1400">
                 <a:solidFill>
-                  <a:srgbClr val="FFFFFF"/>
+                  <a:srgbClr val="000000"/>
                 </a:solidFill>
               </a:defRPr>
             </a:pPr>
@@ -6913,7 +7227,7 @@
               </a:spcAft>
               <a:defRPr sz="1400">
                 <a:solidFill>
-                  <a:srgbClr val="FFFFFF"/>
+                  <a:srgbClr val="000000"/>
                 </a:solidFill>
               </a:defRPr>
             </a:pPr>
@@ -6928,7 +7242,7 @@
               </a:spcAft>
               <a:defRPr sz="1400">
                 <a:solidFill>
-                  <a:srgbClr val="FFFFFF"/>
+                  <a:srgbClr val="000000"/>
                 </a:solidFill>
               </a:defRPr>
             </a:pPr>
@@ -6943,7 +7257,7 @@
               </a:spcAft>
               <a:defRPr sz="1400">
                 <a:solidFill>
-                  <a:srgbClr val="FFFFFF"/>
+                  <a:srgbClr val="000000"/>
                 </a:solidFill>
               </a:defRPr>
             </a:pPr>
@@ -6981,7 +7295,7 @@
               </a:spcAft>
               <a:defRPr sz="1400">
                 <a:solidFill>
-                  <a:srgbClr val="FFFFFF"/>
+                  <a:srgbClr val="000000"/>
                 </a:solidFill>
               </a:defRPr>
             </a:pPr>
@@ -6996,7 +7310,7 @@
               </a:spcAft>
               <a:defRPr sz="1400">
                 <a:solidFill>
-                  <a:srgbClr val="FFFFFF"/>
+                  <a:srgbClr val="000000"/>
                 </a:solidFill>
               </a:defRPr>
             </a:pPr>
@@ -7011,7 +7325,7 @@
               </a:spcAft>
               <a:defRPr sz="1400">
                 <a:solidFill>
-                  <a:srgbClr val="FFFFFF"/>
+                  <a:srgbClr val="000000"/>
                 </a:solidFill>
               </a:defRPr>
             </a:pPr>
@@ -7026,7 +7340,7 @@
               </a:spcAft>
               <a:defRPr sz="1400">
                 <a:solidFill>
-                  <a:srgbClr val="FFFFFF"/>
+                  <a:srgbClr val="000000"/>
                 </a:solidFill>
               </a:defRPr>
             </a:pPr>
@@ -7041,7 +7355,7 @@
               </a:spcAft>
               <a:defRPr sz="1400">
                 <a:solidFill>
-                  <a:srgbClr val="FFFFFF"/>
+                  <a:srgbClr val="000000"/>
                 </a:solidFill>
               </a:defRPr>
             </a:pPr>
@@ -7056,7 +7370,7 @@
               </a:spcAft>
               <a:defRPr sz="1400">
                 <a:solidFill>
-                  <a:srgbClr val="FFFFFF"/>
+                  <a:srgbClr val="000000"/>
                 </a:solidFill>
               </a:defRPr>
             </a:pPr>
@@ -7075,12 +7389,12 @@
 </file>
 
 <file path=ppt/slides/slide8.xml><?xml version="1.0" encoding="utf-8"?>
-<p:sld xmlns:a="http://schemas.openxmlformats.org/drawingml/2006/main" xmlns:p="http://schemas.openxmlformats.org/presentationml/2006/main" xmlns:r="http://schemas.openxmlformats.org/officeDocument/2006/relationships">
+<p:sld xmlns:a="http://schemas.openxmlformats.org/drawingml/2006/main" xmlns:r="http://schemas.openxmlformats.org/officeDocument/2006/relationships" xmlns:p="http://schemas.openxmlformats.org/presentationml/2006/main">
   <p:cSld>
     <p:bg>
       <p:bgPr>
         <a:solidFill>
-          <a:srgbClr val="1B1B2F"/>
+          <a:srgbClr val="FFFFFF"/>
         </a:solidFill>
         <a:effectLst/>
       </p:bgPr>
@@ -7091,7 +7405,14 @@
         <p:cNvGrpSpPr/>
         <p:nvPr/>
       </p:nvGrpSpPr>
-      <p:grpSpPr/>
+      <p:grpSpPr>
+        <a:xfrm>
+          <a:off x="0" y="0"/>
+          <a:ext cx="0" cy="0"/>
+          <a:chOff x="0" y="0"/>
+          <a:chExt cx="0" cy="0"/>
+        </a:xfrm>
+      </p:grpSpPr>
       <p:sp>
         <p:nvSpPr>
           <p:cNvPr id="2" name="TextBox 1"/>
@@ -7117,7 +7438,7 @@
             <a:pPr algn="l">
               <a:defRPr sz="2800" b="1">
                 <a:solidFill>
-                  <a:srgbClr val="007BFF"/>
+                  <a:srgbClr val="000000"/>
                 </a:solidFill>
               </a:defRPr>
             </a:pPr>
@@ -7142,7 +7463,7 @@
             <a:avLst/>
           </a:prstGeom>
           <a:solidFill>
-            <a:srgbClr val="007BFF"/>
+            <a:srgbClr val="000000"/>
           </a:solidFill>
           <a:ln>
             <a:noFill/>
@@ -7167,6 +7488,7 @@
           <a:lstStyle/>
           <a:p>
             <a:pPr algn="ctr"/>
+            <a:endParaRPr/>
           </a:p>
         </p:txBody>
       </p:sp>
@@ -7198,7 +7520,7 @@
               </a:spcAft>
               <a:defRPr sz="1600">
                 <a:solidFill>
-                  <a:srgbClr val="FFFFFF"/>
+                  <a:srgbClr val="000000"/>
                 </a:solidFill>
               </a:defRPr>
             </a:pPr>
@@ -7213,7 +7535,7 @@
               </a:spcAft>
               <a:defRPr sz="1600">
                 <a:solidFill>
-                  <a:srgbClr val="FFFFFF"/>
+                  <a:srgbClr val="000000"/>
                 </a:solidFill>
               </a:defRPr>
             </a:pPr>
@@ -7228,7 +7550,7 @@
               </a:spcAft>
               <a:defRPr sz="1600">
                 <a:solidFill>
-                  <a:srgbClr val="FFFFFF"/>
+                  <a:srgbClr val="000000"/>
                 </a:solidFill>
               </a:defRPr>
             </a:pPr>
@@ -7243,7 +7565,7 @@
               </a:spcAft>
               <a:defRPr sz="1600">
                 <a:solidFill>
-                  <a:srgbClr val="FFFFFF"/>
+                  <a:srgbClr val="000000"/>
                 </a:solidFill>
               </a:defRPr>
             </a:pPr>
@@ -7258,7 +7580,7 @@
               </a:spcAft>
               <a:defRPr sz="1600">
                 <a:solidFill>
-                  <a:srgbClr val="FFFFFF"/>
+                  <a:srgbClr val="000000"/>
                 </a:solidFill>
               </a:defRPr>
             </a:pPr>
@@ -7273,7 +7595,7 @@
               </a:spcAft>
               <a:defRPr sz="1600">
                 <a:solidFill>
-                  <a:srgbClr val="FFFFFF"/>
+                  <a:srgbClr val="000000"/>
                 </a:solidFill>
               </a:defRPr>
             </a:pPr>
@@ -7288,7 +7610,7 @@
               </a:spcAft>
               <a:defRPr sz="1600">
                 <a:solidFill>
-                  <a:srgbClr val="FFFFFF"/>
+                  <a:srgbClr val="000000"/>
                 </a:solidFill>
               </a:defRPr>
             </a:pPr>
@@ -7307,12 +7629,12 @@
 </file>
 
 <file path=ppt/slides/slide9.xml><?xml version="1.0" encoding="utf-8"?>
-<p:sld xmlns:a="http://schemas.openxmlformats.org/drawingml/2006/main" xmlns:p="http://schemas.openxmlformats.org/presentationml/2006/main" xmlns:r="http://schemas.openxmlformats.org/officeDocument/2006/relationships">
+<p:sld xmlns:a="http://schemas.openxmlformats.org/drawingml/2006/main" xmlns:r="http://schemas.openxmlformats.org/officeDocument/2006/relationships" xmlns:p="http://schemas.openxmlformats.org/presentationml/2006/main">
   <p:cSld>
     <p:bg>
       <p:bgPr>
         <a:solidFill>
-          <a:srgbClr val="1B1B2F"/>
+          <a:srgbClr val="FFFFFF"/>
         </a:solidFill>
         <a:effectLst/>
       </p:bgPr>
@@ -7323,7 +7645,14 @@
         <p:cNvGrpSpPr/>
         <p:nvPr/>
       </p:nvGrpSpPr>
-      <p:grpSpPr/>
+      <p:grpSpPr>
+        <a:xfrm>
+          <a:off x="0" y="0"/>
+          <a:ext cx="0" cy="0"/>
+          <a:chOff x="0" y="0"/>
+          <a:chExt cx="0" cy="0"/>
+        </a:xfrm>
+      </p:grpSpPr>
       <p:sp>
         <p:nvSpPr>
           <p:cNvPr id="2" name="TextBox 1"/>
@@ -7349,7 +7678,7 @@
             <a:pPr algn="l">
               <a:defRPr sz="2800" b="1">
                 <a:solidFill>
-                  <a:srgbClr val="007BFF"/>
+                  <a:srgbClr val="000000"/>
                 </a:solidFill>
               </a:defRPr>
             </a:pPr>
@@ -7378,9 +7707,27 @@
                 <a:tableStyleId>{5C22544A-7EE6-4342-B048-85BDC9FD1C3A}</a:tableStyleId>
               </a:tblPr>
               <a:tblGrid>
-                <a:gridCol w="2743200"/>
-                <a:gridCol w="2743200"/>
-                <a:gridCol w="2743200"/>
+                <a:gridCol w="2743200">
+                  <a:extLst>
+                    <a:ext uri="{9D8B030D-6E8A-4147-A177-3AD203B41FA5}">
+                      <a16:colId xmlns:a16="http://schemas.microsoft.com/office/drawing/2014/main" val="20000"/>
+                    </a:ext>
+                  </a:extLst>
+                </a:gridCol>
+                <a:gridCol w="2743200">
+                  <a:extLst>
+                    <a:ext uri="{9D8B030D-6E8A-4147-A177-3AD203B41FA5}">
+                      <a16:colId xmlns:a16="http://schemas.microsoft.com/office/drawing/2014/main" val="20001"/>
+                    </a:ext>
+                  </a:extLst>
+                </a:gridCol>
+                <a:gridCol w="2743200">
+                  <a:extLst>
+                    <a:ext uri="{9D8B030D-6E8A-4147-A177-3AD203B41FA5}">
+                      <a16:colId xmlns:a16="http://schemas.microsoft.com/office/drawing/2014/main" val="20002"/>
+                    </a:ext>
+                  </a:extLst>
+                </a:gridCol>
               </a:tblGrid>
               <a:tr h="365760">
                 <a:tc>
@@ -7402,7 +7749,7 @@
                   </a:txBody>
                   <a:tcPr>
                     <a:solidFill>
-                      <a:srgbClr val="007BFF"/>
+                      <a:srgbClr val="000000"/>
                     </a:solidFill>
                   </a:tcPr>
                 </a:tc>
@@ -7425,7 +7772,7 @@
                   </a:txBody>
                   <a:tcPr>
                     <a:solidFill>
-                      <a:srgbClr val="007BFF"/>
+                      <a:srgbClr val="000000"/>
                     </a:solidFill>
                   </a:tcPr>
                 </a:tc>
@@ -7448,10 +7795,15 @@
                   </a:txBody>
                   <a:tcPr>
                     <a:solidFill>
-                      <a:srgbClr val="007BFF"/>
-                    </a:solidFill>
-                  </a:tcPr>
-                </a:tc>
+                      <a:srgbClr val="000000"/>
+                    </a:solidFill>
+                  </a:tcPr>
+                </a:tc>
+                <a:extLst>
+                  <a:ext uri="{0D108BD9-81ED-4DB2-BD59-A6C34878D82A}">
+                    <a16:rowId xmlns:a16="http://schemas.microsoft.com/office/drawing/2014/main" val="10000"/>
+                  </a:ext>
+                </a:extLst>
               </a:tr>
               <a:tr h="365760">
                 <a:tc>
@@ -7462,7 +7814,7 @@
                       <a:pPr>
                         <a:defRPr sz="1200">
                           <a:solidFill>
-                            <a:srgbClr val="FFFFFF"/>
+                            <a:srgbClr val="000000"/>
                           </a:solidFill>
                         </a:defRPr>
                       </a:pPr>
@@ -7473,7 +7825,7 @@
                   </a:txBody>
                   <a:tcPr>
                     <a:solidFill>
-                      <a:srgbClr val="2A2A40"/>
+                      <a:srgbClr val="F0F0F0"/>
                     </a:solidFill>
                   </a:tcPr>
                 </a:tc>
@@ -7485,7 +7837,7 @@
                       <a:pPr>
                         <a:defRPr sz="1200">
                           <a:solidFill>
-                            <a:srgbClr val="FFFFFF"/>
+                            <a:srgbClr val="000000"/>
                           </a:solidFill>
                         </a:defRPr>
                       </a:pPr>
@@ -7496,7 +7848,7 @@
                   </a:txBody>
                   <a:tcPr>
                     <a:solidFill>
-                      <a:srgbClr val="2A2A40"/>
+                      <a:srgbClr val="F0F0F0"/>
                     </a:solidFill>
                   </a:tcPr>
                 </a:tc>
@@ -7508,7 +7860,7 @@
                       <a:pPr>
                         <a:defRPr sz="1200">
                           <a:solidFill>
-                            <a:srgbClr val="FFFFFF"/>
+                            <a:srgbClr val="000000"/>
                           </a:solidFill>
                         </a:defRPr>
                       </a:pPr>
@@ -7519,10 +7871,15 @@
                   </a:txBody>
                   <a:tcPr>
                     <a:solidFill>
-                      <a:srgbClr val="2A2A40"/>
-                    </a:solidFill>
-                  </a:tcPr>
-                </a:tc>
+                      <a:srgbClr val="F0F0F0"/>
+                    </a:solidFill>
+                  </a:tcPr>
+                </a:tc>
+                <a:extLst>
+                  <a:ext uri="{0D108BD9-81ED-4DB2-BD59-A6C34878D82A}">
+                    <a16:rowId xmlns:a16="http://schemas.microsoft.com/office/drawing/2014/main" val="10001"/>
+                  </a:ext>
+                </a:extLst>
               </a:tr>
               <a:tr h="365760">
                 <a:tc>
@@ -7533,7 +7890,7 @@
                       <a:pPr>
                         <a:defRPr sz="1200">
                           <a:solidFill>
-                            <a:srgbClr val="FFFFFF"/>
+                            <a:srgbClr val="000000"/>
                           </a:solidFill>
                         </a:defRPr>
                       </a:pPr>
@@ -7544,7 +7901,7 @@
                   </a:txBody>
                   <a:tcPr>
                     <a:solidFill>
-                      <a:srgbClr val="222238"/>
+                      <a:srgbClr val="FFFFFF"/>
                     </a:solidFill>
                   </a:tcPr>
                 </a:tc>
@@ -7556,7 +7913,7 @@
                       <a:pPr>
                         <a:defRPr sz="1200">
                           <a:solidFill>
-                            <a:srgbClr val="FFFFFF"/>
+                            <a:srgbClr val="000000"/>
                           </a:solidFill>
                         </a:defRPr>
                       </a:pPr>
@@ -7567,7 +7924,7 @@
                   </a:txBody>
                   <a:tcPr>
                     <a:solidFill>
-                      <a:srgbClr val="222238"/>
+                      <a:srgbClr val="FFFFFF"/>
                     </a:solidFill>
                   </a:tcPr>
                 </a:tc>
@@ -7579,7 +7936,7 @@
                       <a:pPr>
                         <a:defRPr sz="1200">
                           <a:solidFill>
-                            <a:srgbClr val="FFFFFF"/>
+                            <a:srgbClr val="000000"/>
                           </a:solidFill>
                         </a:defRPr>
                       </a:pPr>
@@ -7590,10 +7947,15 @@
                   </a:txBody>
                   <a:tcPr>
                     <a:solidFill>
-                      <a:srgbClr val="222238"/>
-                    </a:solidFill>
-                  </a:tcPr>
-                </a:tc>
+                      <a:srgbClr val="FFFFFF"/>
+                    </a:solidFill>
+                  </a:tcPr>
+                </a:tc>
+                <a:extLst>
+                  <a:ext uri="{0D108BD9-81ED-4DB2-BD59-A6C34878D82A}">
+                    <a16:rowId xmlns:a16="http://schemas.microsoft.com/office/drawing/2014/main" val="10002"/>
+                  </a:ext>
+                </a:extLst>
               </a:tr>
               <a:tr h="365760">
                 <a:tc>
@@ -7604,7 +7966,7 @@
                       <a:pPr>
                         <a:defRPr sz="1200">
                           <a:solidFill>
-                            <a:srgbClr val="FFFFFF"/>
+                            <a:srgbClr val="000000"/>
                           </a:solidFill>
                         </a:defRPr>
                       </a:pPr>
@@ -7615,7 +7977,7 @@
                   </a:txBody>
                   <a:tcPr>
                     <a:solidFill>
-                      <a:srgbClr val="2A2A40"/>
+                      <a:srgbClr val="F0F0F0"/>
                     </a:solidFill>
                   </a:tcPr>
                 </a:tc>
@@ -7627,7 +7989,7 @@
                       <a:pPr>
                         <a:defRPr sz="1200">
                           <a:solidFill>
-                            <a:srgbClr val="FFFFFF"/>
+                            <a:srgbClr val="000000"/>
                           </a:solidFill>
                         </a:defRPr>
                       </a:pPr>
@@ -7638,7 +8000,7 @@
                   </a:txBody>
                   <a:tcPr>
                     <a:solidFill>
-                      <a:srgbClr val="2A2A40"/>
+                      <a:srgbClr val="F0F0F0"/>
                     </a:solidFill>
                   </a:tcPr>
                 </a:tc>
@@ -7650,7 +8012,7 @@
                       <a:pPr>
                         <a:defRPr sz="1200">
                           <a:solidFill>
-                            <a:srgbClr val="FFFFFF"/>
+                            <a:srgbClr val="000000"/>
                           </a:solidFill>
                         </a:defRPr>
                       </a:pPr>
@@ -7661,10 +8023,15 @@
                   </a:txBody>
                   <a:tcPr>
                     <a:solidFill>
-                      <a:srgbClr val="2A2A40"/>
-                    </a:solidFill>
-                  </a:tcPr>
-                </a:tc>
+                      <a:srgbClr val="F0F0F0"/>
+                    </a:solidFill>
+                  </a:tcPr>
+                </a:tc>
+                <a:extLst>
+                  <a:ext uri="{0D108BD9-81ED-4DB2-BD59-A6C34878D82A}">
+                    <a16:rowId xmlns:a16="http://schemas.microsoft.com/office/drawing/2014/main" val="10003"/>
+                  </a:ext>
+                </a:extLst>
               </a:tr>
               <a:tr h="365760">
                 <a:tc>
@@ -7675,7 +8042,7 @@
                       <a:pPr>
                         <a:defRPr sz="1200">
                           <a:solidFill>
-                            <a:srgbClr val="FFFFFF"/>
+                            <a:srgbClr val="000000"/>
                           </a:solidFill>
                         </a:defRPr>
                       </a:pPr>
@@ -7686,7 +8053,7 @@
                   </a:txBody>
                   <a:tcPr>
                     <a:solidFill>
-                      <a:srgbClr val="222238"/>
+                      <a:srgbClr val="FFFFFF"/>
                     </a:solidFill>
                   </a:tcPr>
                 </a:tc>
@@ -7698,7 +8065,7 @@
                       <a:pPr>
                         <a:defRPr sz="1200">
                           <a:solidFill>
-                            <a:srgbClr val="FFFFFF"/>
+                            <a:srgbClr val="000000"/>
                           </a:solidFill>
                         </a:defRPr>
                       </a:pPr>
@@ -7709,7 +8076,7 @@
                   </a:txBody>
                   <a:tcPr>
                     <a:solidFill>
-                      <a:srgbClr val="222238"/>
+                      <a:srgbClr val="FFFFFF"/>
                     </a:solidFill>
                   </a:tcPr>
                 </a:tc>
@@ -7721,7 +8088,7 @@
                       <a:pPr>
                         <a:defRPr sz="1200">
                           <a:solidFill>
-                            <a:srgbClr val="FFFFFF"/>
+                            <a:srgbClr val="000000"/>
                           </a:solidFill>
                         </a:defRPr>
                       </a:pPr>
@@ -7732,10 +8099,15 @@
                   </a:txBody>
                   <a:tcPr>
                     <a:solidFill>
-                      <a:srgbClr val="222238"/>
-                    </a:solidFill>
-                  </a:tcPr>
-                </a:tc>
+                      <a:srgbClr val="FFFFFF"/>
+                    </a:solidFill>
+                  </a:tcPr>
+                </a:tc>
+                <a:extLst>
+                  <a:ext uri="{0D108BD9-81ED-4DB2-BD59-A6C34878D82A}">
+                    <a16:rowId xmlns:a16="http://schemas.microsoft.com/office/drawing/2014/main" val="10004"/>
+                  </a:ext>
+                </a:extLst>
               </a:tr>
               <a:tr h="365760">
                 <a:tc>
@@ -7746,7 +8118,7 @@
                       <a:pPr>
                         <a:defRPr sz="1200">
                           <a:solidFill>
-                            <a:srgbClr val="FFFFFF"/>
+                            <a:srgbClr val="000000"/>
                           </a:solidFill>
                         </a:defRPr>
                       </a:pPr>
@@ -7757,7 +8129,7 @@
                   </a:txBody>
                   <a:tcPr>
                     <a:solidFill>
-                      <a:srgbClr val="2A2A40"/>
+                      <a:srgbClr val="F0F0F0"/>
                     </a:solidFill>
                   </a:tcPr>
                 </a:tc>
@@ -7769,7 +8141,7 @@
                       <a:pPr>
                         <a:defRPr sz="1200">
                           <a:solidFill>
-                            <a:srgbClr val="FFFFFF"/>
+                            <a:srgbClr val="000000"/>
                           </a:solidFill>
                         </a:defRPr>
                       </a:pPr>
@@ -7780,7 +8152,7 @@
                   </a:txBody>
                   <a:tcPr>
                     <a:solidFill>
-                      <a:srgbClr val="2A2A40"/>
+                      <a:srgbClr val="F0F0F0"/>
                     </a:solidFill>
                   </a:tcPr>
                 </a:tc>
@@ -7792,7 +8164,7 @@
                       <a:pPr>
                         <a:defRPr sz="1200">
                           <a:solidFill>
-                            <a:srgbClr val="FFFFFF"/>
+                            <a:srgbClr val="000000"/>
                           </a:solidFill>
                         </a:defRPr>
                       </a:pPr>
@@ -7803,10 +8175,15 @@
                   </a:txBody>
                   <a:tcPr>
                     <a:solidFill>
-                      <a:srgbClr val="2A2A40"/>
-                    </a:solidFill>
-                  </a:tcPr>
-                </a:tc>
+                      <a:srgbClr val="F0F0F0"/>
+                    </a:solidFill>
+                  </a:tcPr>
+                </a:tc>
+                <a:extLst>
+                  <a:ext uri="{0D108BD9-81ED-4DB2-BD59-A6C34878D82A}">
+                    <a16:rowId xmlns:a16="http://schemas.microsoft.com/office/drawing/2014/main" val="10005"/>
+                  </a:ext>
+                </a:extLst>
               </a:tr>
               <a:tr h="365760">
                 <a:tc>
@@ -7817,7 +8194,7 @@
                       <a:pPr>
                         <a:defRPr sz="1200">
                           <a:solidFill>
-                            <a:srgbClr val="FFFFFF"/>
+                            <a:srgbClr val="000000"/>
                           </a:solidFill>
                         </a:defRPr>
                       </a:pPr>
@@ -7828,7 +8205,7 @@
                   </a:txBody>
                   <a:tcPr>
                     <a:solidFill>
-                      <a:srgbClr val="222238"/>
+                      <a:srgbClr val="FFFFFF"/>
                     </a:solidFill>
                   </a:tcPr>
                 </a:tc>
@@ -7840,7 +8217,7 @@
                       <a:pPr>
                         <a:defRPr sz="1200">
                           <a:solidFill>
-                            <a:srgbClr val="FFFFFF"/>
+                            <a:srgbClr val="000000"/>
                           </a:solidFill>
                         </a:defRPr>
                       </a:pPr>
@@ -7851,7 +8228,7 @@
                   </a:txBody>
                   <a:tcPr>
                     <a:solidFill>
-                      <a:srgbClr val="222238"/>
+                      <a:srgbClr val="FFFFFF"/>
                     </a:solidFill>
                   </a:tcPr>
                 </a:tc>
@@ -7863,7 +8240,7 @@
                       <a:pPr>
                         <a:defRPr sz="1200">
                           <a:solidFill>
-                            <a:srgbClr val="FFFFFF"/>
+                            <a:srgbClr val="000000"/>
                           </a:solidFill>
                         </a:defRPr>
                       </a:pPr>
@@ -7874,10 +8251,15 @@
                   </a:txBody>
                   <a:tcPr>
                     <a:solidFill>
-                      <a:srgbClr val="222238"/>
-                    </a:solidFill>
-                  </a:tcPr>
-                </a:tc>
+                      <a:srgbClr val="FFFFFF"/>
+                    </a:solidFill>
+                  </a:tcPr>
+                </a:tc>
+                <a:extLst>
+                  <a:ext uri="{0D108BD9-81ED-4DB2-BD59-A6C34878D82A}">
+                    <a16:rowId xmlns:a16="http://schemas.microsoft.com/office/drawing/2014/main" val="10006"/>
+                  </a:ext>
+                </a:extLst>
               </a:tr>
               <a:tr h="365760">
                 <a:tc>
@@ -7888,7 +8270,7 @@
                       <a:pPr>
                         <a:defRPr sz="1200">
                           <a:solidFill>
-                            <a:srgbClr val="FFFFFF"/>
+                            <a:srgbClr val="000000"/>
                           </a:solidFill>
                         </a:defRPr>
                       </a:pPr>
@@ -7899,7 +8281,7 @@
                   </a:txBody>
                   <a:tcPr>
                     <a:solidFill>
-                      <a:srgbClr val="2A2A40"/>
+                      <a:srgbClr val="F0F0F0"/>
                     </a:solidFill>
                   </a:tcPr>
                 </a:tc>
@@ -7911,7 +8293,7 @@
                       <a:pPr>
                         <a:defRPr sz="1200">
                           <a:solidFill>
-                            <a:srgbClr val="FFFFFF"/>
+                            <a:srgbClr val="000000"/>
                           </a:solidFill>
                         </a:defRPr>
                       </a:pPr>
@@ -7922,7 +8304,7 @@
                   </a:txBody>
                   <a:tcPr>
                     <a:solidFill>
-                      <a:srgbClr val="2A2A40"/>
+                      <a:srgbClr val="F0F0F0"/>
                     </a:solidFill>
                   </a:tcPr>
                 </a:tc>
@@ -7934,7 +8316,7 @@
                       <a:pPr>
                         <a:defRPr sz="1200">
                           <a:solidFill>
-                            <a:srgbClr val="FFFFFF"/>
+                            <a:srgbClr val="000000"/>
                           </a:solidFill>
                         </a:defRPr>
                       </a:pPr>
@@ -7945,10 +8327,15 @@
                   </a:txBody>
                   <a:tcPr>
                     <a:solidFill>
-                      <a:srgbClr val="2A2A40"/>
-                    </a:solidFill>
-                  </a:tcPr>
-                </a:tc>
+                      <a:srgbClr val="F0F0F0"/>
+                    </a:solidFill>
+                  </a:tcPr>
+                </a:tc>
+                <a:extLst>
+                  <a:ext uri="{0D108BD9-81ED-4DB2-BD59-A6C34878D82A}">
+                    <a16:rowId xmlns:a16="http://schemas.microsoft.com/office/drawing/2014/main" val="10007"/>
+                  </a:ext>
+                </a:extLst>
               </a:tr>
               <a:tr h="365760">
                 <a:tc>
@@ -7959,7 +8346,7 @@
                       <a:pPr>
                         <a:defRPr sz="1200">
                           <a:solidFill>
-                            <a:srgbClr val="FFFFFF"/>
+                            <a:srgbClr val="000000"/>
                           </a:solidFill>
                         </a:defRPr>
                       </a:pPr>
@@ -7970,7 +8357,7 @@
                   </a:txBody>
                   <a:tcPr>
                     <a:solidFill>
-                      <a:srgbClr val="222238"/>
+                      <a:srgbClr val="FFFFFF"/>
                     </a:solidFill>
                   </a:tcPr>
                 </a:tc>
@@ -7982,7 +8369,7 @@
                       <a:pPr>
                         <a:defRPr sz="1200">
                           <a:solidFill>
-                            <a:srgbClr val="FFFFFF"/>
+                            <a:srgbClr val="000000"/>
                           </a:solidFill>
                         </a:defRPr>
                       </a:pPr>
@@ -7993,7 +8380,7 @@
                   </a:txBody>
                   <a:tcPr>
                     <a:solidFill>
-                      <a:srgbClr val="222238"/>
+                      <a:srgbClr val="FFFFFF"/>
                     </a:solidFill>
                   </a:tcPr>
                 </a:tc>
@@ -8005,7 +8392,7 @@
                       <a:pPr>
                         <a:defRPr sz="1200">
                           <a:solidFill>
-                            <a:srgbClr val="FFFFFF"/>
+                            <a:srgbClr val="000000"/>
                           </a:solidFill>
                         </a:defRPr>
                       </a:pPr>
@@ -8016,10 +8403,15 @@
                   </a:txBody>
                   <a:tcPr>
                     <a:solidFill>
-                      <a:srgbClr val="222238"/>
-                    </a:solidFill>
-                  </a:tcPr>
-                </a:tc>
+                      <a:srgbClr val="FFFFFF"/>
+                    </a:solidFill>
+                  </a:tcPr>
+                </a:tc>
+                <a:extLst>
+                  <a:ext uri="{0D108BD9-81ED-4DB2-BD59-A6C34878D82A}">
+                    <a16:rowId xmlns:a16="http://schemas.microsoft.com/office/drawing/2014/main" val="10008"/>
+                  </a:ext>
+                </a:extLst>
               </a:tr>
               <a:tr h="365760">
                 <a:tc>
@@ -8030,7 +8422,7 @@
                       <a:pPr>
                         <a:defRPr sz="1200">
                           <a:solidFill>
-                            <a:srgbClr val="FFFFFF"/>
+                            <a:srgbClr val="000000"/>
                           </a:solidFill>
                         </a:defRPr>
                       </a:pPr>
@@ -8041,7 +8433,7 @@
                   </a:txBody>
                   <a:tcPr>
                     <a:solidFill>
-                      <a:srgbClr val="2A2A40"/>
+                      <a:srgbClr val="F0F0F0"/>
                     </a:solidFill>
                   </a:tcPr>
                 </a:tc>
@@ -8053,7 +8445,7 @@
                       <a:pPr>
                         <a:defRPr sz="1200">
                           <a:solidFill>
-                            <a:srgbClr val="FFFFFF"/>
+                            <a:srgbClr val="000000"/>
                           </a:solidFill>
                         </a:defRPr>
                       </a:pPr>
@@ -8064,7 +8456,7 @@
                   </a:txBody>
                   <a:tcPr>
                     <a:solidFill>
-                      <a:srgbClr val="2A2A40"/>
+                      <a:srgbClr val="F0F0F0"/>
                     </a:solidFill>
                   </a:tcPr>
                 </a:tc>
@@ -8076,7 +8468,7 @@
                       <a:pPr>
                         <a:defRPr sz="1200">
                           <a:solidFill>
-                            <a:srgbClr val="FFFFFF"/>
+                            <a:srgbClr val="000000"/>
                           </a:solidFill>
                         </a:defRPr>
                       </a:pPr>
@@ -8087,10 +8479,15 @@
                   </a:txBody>
                   <a:tcPr>
                     <a:solidFill>
-                      <a:srgbClr val="2A2A40"/>
-                    </a:solidFill>
-                  </a:tcPr>
-                </a:tc>
+                      <a:srgbClr val="F0F0F0"/>
+                    </a:solidFill>
+                  </a:tcPr>
+                </a:tc>
+                <a:extLst>
+                  <a:ext uri="{0D108BD9-81ED-4DB2-BD59-A6C34878D82A}">
+                    <a16:rowId xmlns:a16="http://schemas.microsoft.com/office/drawing/2014/main" val="10009"/>
+                  </a:ext>
+                </a:extLst>
               </a:tr>
               <a:tr h="365760">
                 <a:tc>
@@ -8101,7 +8498,7 @@
                       <a:pPr>
                         <a:defRPr sz="1200">
                           <a:solidFill>
-                            <a:srgbClr val="FFFFFF"/>
+                            <a:srgbClr val="000000"/>
                           </a:solidFill>
                         </a:defRPr>
                       </a:pPr>
@@ -8112,7 +8509,7 @@
                   </a:txBody>
                   <a:tcPr>
                     <a:solidFill>
-                      <a:srgbClr val="222238"/>
+                      <a:srgbClr val="FFFFFF"/>
                     </a:solidFill>
                   </a:tcPr>
                 </a:tc>
@@ -8124,7 +8521,7 @@
                       <a:pPr>
                         <a:defRPr sz="1200">
                           <a:solidFill>
-                            <a:srgbClr val="FFFFFF"/>
+                            <a:srgbClr val="000000"/>
                           </a:solidFill>
                         </a:defRPr>
                       </a:pPr>
@@ -8135,7 +8532,7 @@
                   </a:txBody>
                   <a:tcPr>
                     <a:solidFill>
-                      <a:srgbClr val="222238"/>
+                      <a:srgbClr val="FFFFFF"/>
                     </a:solidFill>
                   </a:tcPr>
                 </a:tc>
@@ -8147,7 +8544,7 @@
                       <a:pPr>
                         <a:defRPr sz="1200">
                           <a:solidFill>
-                            <a:srgbClr val="FFFFFF"/>
+                            <a:srgbClr val="000000"/>
                           </a:solidFill>
                         </a:defRPr>
                       </a:pPr>
@@ -8158,10 +8555,15 @@
                   </a:txBody>
                   <a:tcPr>
                     <a:solidFill>
-                      <a:srgbClr val="222238"/>
-                    </a:solidFill>
-                  </a:tcPr>
-                </a:tc>
+                      <a:srgbClr val="FFFFFF"/>
+                    </a:solidFill>
+                  </a:tcPr>
+                </a:tc>
+                <a:extLst>
+                  <a:ext uri="{0D108BD9-81ED-4DB2-BD59-A6C34878D82A}">
+                    <a16:rowId xmlns:a16="http://schemas.microsoft.com/office/drawing/2014/main" val="10010"/>
+                  </a:ext>
+                </a:extLst>
               </a:tr>
             </a:tbl>
           </a:graphicData>
